--- a/10-Knowledge-Products/KP1-GEA/videos/module_5/en/decks/KP1_M5_Deck_v0.1.pptx
+++ b/10-Knowledge-Products/KP1-GEA/videos/module_5/en/decks/KP1_M5_Deck_v0.1.pptx
@@ -1628,6 +1628,12 @@
               <a:t>VO: Here is the argument the play helps you make. Inside any one project, building its own small identity function is cheaper and faster than reusing the national one. So every project builds its own. Across ten projects, the country has paid ten times for identity, and the citizen proves who they are on paper at every counter. The saving from re-use is real, but it only exists when you add up the whole government — which is exactly the view no project has, and the budget authority rarely sees.</a:t>
             </a:r>
           </a:p>
+          <a:p/>
+          <a:p>
+            <a:r>
+              <a:t>On screen: bar length is the argument — no figures. The top pair shows why the project chooses to build; the bottom pair shows what that choice costs the country. Reveal the bottom pair on 'Across ten projects'.</a:t>
+            </a:r>
+          </a:p>
         </p:txBody>
       </p:sp>
       <p:sp>
@@ -3791,7 +3797,7 @@
           <a:lstStyle/>
           <a:p>
             <a:r>
-              <a:t>VO, slide 1: Every play in this topic produces a draft fast. This last part is about the discipline that keeps those drafts from becoming liabilities. Four safeguards. Skip them, and AI becomes a fast way to put wrong facts, fabricated sources, or leaked data into a government decision.</a:t>
+              <a:t>VO, slide 1: Every play in this module produces a draft fast. This last part is about the discipline that keeps those drafts from becoming liabilities. Four safeguards. Skip them, and AI becomes a fast way to put wrong facts, fabricated sources, or leaked data into a government decision.</a:t>
             </a:r>
           </a:p>
           <a:p/>
@@ -4153,13 +4159,13 @@
           <a:lstStyle/>
           <a:p>
             <a:r>
-              <a:t>VO: Second, the shape of a good prompt. Every play in this topic uses the same four parts. One — name the input you are pasting: below is my Discovery brief. Two — break the task into named outputs: score the capabilities, list the gaps, rank them. Three — state the exact output format you want: a four-row table plus three bullets. Four — add a safeguard line that names this prompt's specific risk. A prompt with these four parts gives you a usable artefact. A vague one — help me with my architecture — gives you vague mush.</a:t>
+              <a:t>VO: Second, the shape of a good prompt. Every play in this module uses the same four parts. One — name the input you are pasting: below is my Discovery brief. Two — break the task into named outputs: score the capabilities, list the gaps, rank them. Three — state the exact output format you want: a four-row table plus three bullets. Four — add a safeguard line that names this prompt's specific risk. A prompt with these four parts gives you a usable artefact. A vague one — help me with my architecture — gives you vague mush.</a:t>
             </a:r>
           </a:p>
           <a:p/>
           <a:p>
             <a:r>
-              <a:t>Production cue: the centrepiece slide of the module. Reveal the four rows one at a time and hold the finished slide a beat longer — every later video refers back to it.</a:t>
+              <a:t>Production cue: the centrepiece slide of the module. The four parts are shown as one prompt block on the right, bracketed part by part. Reveal the four parts one at a time and hold the finished slide a beat longer — every later video refers back to it.</a:t>
             </a:r>
           </a:p>
         </p:txBody>
@@ -4591,7 +4597,7 @@
           <a:lstStyle/>
           <a:p>
             <a:r>
-              <a:t>VO: So these are the ground rules. AI is a drafting partner, not an oracle. Use the four-part prompt. Make the safeguard specific. And keep the decision yours. Hold to these, and the plays in this topic save you days without leading you astray. Forget them, and AI becomes a fast way to be confidently wrong.</a:t>
+              <a:t>VO: So these are the ground rules. AI is a drafting partner, not an oracle. Use the four-part prompt. Make the safeguard specific. And keep the decision yours. Hold to these, and the plays in this module save you days without leading you astray. Forget them, and AI becomes a fast way to be confidently wrong.</a:t>
             </a:r>
           </a:p>
         </p:txBody>
@@ -15833,73 +15839,18 @@
       </p:sp>
       <p:sp>
         <p:nvSpPr>
-          <p:cNvPr id="4" name="TextBox 3"/>
-          <p:cNvSpPr txBox="1"/>
-          <p:nvPr/>
-        </p:nvSpPr>
-        <p:spPr>
-          <a:xfrm>
-            <a:off x="658368" y="1600200"/>
-            <a:ext cx="10881360" cy="2651760"/>
-          </a:xfrm>
-          <a:prstGeom prst="rect">
-            <a:avLst/>
-          </a:prstGeom>
-          <a:noFill/>
-        </p:spPr>
-        <p:txBody>
-          <a:bodyPr wrap="square">
-            <a:spAutoFit/>
-          </a:bodyPr>
-          <a:lstStyle/>
-          <a:p>
-            <a:pPr>
-              <a:spcAft>
-                <a:spcPts val="1200"/>
-              </a:spcAft>
-            </a:pPr>
-            <a:r>
-              <a:rPr sz="2000" b="0" i="0">
-                <a:solidFill>
-                  <a:srgbClr val="1A1A1A"/>
-                </a:solidFill>
-                <a:latin typeface="Arial"/>
-              </a:rPr>
-              <a:t>Before the interviews, you paste what you know about a body — its mandate, its known systems, its registries. The AI returns a four-layer capture template: the right questions per layer, a reminder to describe and not recommend, and a column to record where each answer came from.</a:t>
-            </a:r>
-          </a:p>
-          <a:p>
-            <a:pPr>
-              <a:spcAft>
-                <a:spcPts val="1200"/>
-              </a:spcAft>
-            </a:pPr>
-            <a:r>
-              <a:rPr sz="2000" b="0" i="0">
-                <a:solidFill>
-                  <a:srgbClr val="1A1A1A"/>
-                </a:solidFill>
-                <a:latin typeface="Arial"/>
-              </a:rPr>
-              <a:t>The template is a starting structure. You still ask the questions and record the real answers.</a:t>
-            </a:r>
-          </a:p>
-        </p:txBody>
-      </p:sp>
-      <p:sp>
-        <p:nvSpPr>
-          <p:cNvPr id="5" name="Rounded Rectangle 4"/>
+          <p:cNvPr id="4" name="Rounded Rectangle 3"/>
           <p:cNvSpPr/>
           <p:nvPr/>
         </p:nvSpPr>
         <p:spPr>
           <a:xfrm>
-            <a:off x="658368" y="4434840"/>
-            <a:ext cx="10881360" cy="1325880"/>
+            <a:off x="658368" y="1645920"/>
+            <a:ext cx="3246120" cy="3840480"/>
           </a:xfrm>
           <a:prstGeom prst="roundRect">
             <a:avLst>
-              <a:gd name="adj" fmla="val 4500"/>
+              <a:gd name="adj" fmla="val 8000"/>
             </a:avLst>
           </a:prstGeom>
           <a:solidFill>
@@ -15925,23 +15876,386 @@
           </a:fontRef>
         </p:style>
         <p:txBody>
-          <a:bodyPr rtlCol="0" anchor="ctr"/>
-          <a:lstStyle/>
-          <a:p>
-            <a:pPr algn="ctr"/>
-          </a:p>
-        </p:txBody>
-      </p:sp>
-      <p:sp>
-        <p:nvSpPr>
-          <p:cNvPr id="6" name="TextBox 5"/>
+          <a:bodyPr rtlCol="0" anchor="t" lIns="128016" rIns="128016" tIns="91440" bIns="54864" wrap="square"/>
+          <a:lstStyle/>
+          <a:p>
+            <a:pPr algn="l">
+              <a:spcAft>
+                <a:spcPts val="300"/>
+              </a:spcAft>
+            </a:pPr>
+            <a:r>
+              <a:rPr sz="1200" b="1" i="0">
+                <a:solidFill>
+                  <a:srgbClr val="006E96"/>
+                </a:solidFill>
+                <a:latin typeface="Arial"/>
+              </a:rPr>
+              <a:t>YOU PASTE</a:t>
+            </a:r>
+          </a:p>
+          <a:p>
+            <a:pPr algn="l">
+              <a:spcAft>
+                <a:spcPts val="300"/>
+              </a:spcAft>
+            </a:pPr>
+            <a:r>
+              <a:rPr sz="1450" b="0" i="0">
+                <a:solidFill>
+                  <a:srgbClr val="1A1A1A"/>
+                </a:solidFill>
+                <a:latin typeface="Arial"/>
+              </a:rPr>
+              <a:t>A body's mandate.</a:t>
+            </a:r>
+          </a:p>
+          <a:p>
+            <a:pPr algn="l">
+              <a:spcAft>
+                <a:spcPts val="300"/>
+              </a:spcAft>
+            </a:pPr>
+            <a:r>
+              <a:rPr sz="1450" b="0" i="0">
+                <a:solidFill>
+                  <a:srgbClr val="1A1A1A"/>
+                </a:solidFill>
+                <a:latin typeface="Arial"/>
+              </a:rPr>
+              <a:t>Its known systems.</a:t>
+            </a:r>
+          </a:p>
+          <a:p>
+            <a:pPr algn="l">
+              <a:spcAft>
+                <a:spcPts val="300"/>
+              </a:spcAft>
+            </a:pPr>
+            <a:r>
+              <a:rPr sz="1450" b="0" i="0">
+                <a:solidFill>
+                  <a:srgbClr val="1A1A1A"/>
+                </a:solidFill>
+                <a:latin typeface="Arial"/>
+              </a:rPr>
+              <a:t>Its registries.</a:t>
+            </a:r>
+          </a:p>
+        </p:txBody>
+      </p:sp>
+      <p:sp>
+        <p:nvSpPr>
+          <p:cNvPr id="5" name="Rounded Rectangle 4"/>
+          <p:cNvSpPr/>
+          <p:nvPr/>
+        </p:nvSpPr>
+        <p:spPr>
+          <a:xfrm>
+            <a:off x="4471416" y="1645920"/>
+            <a:ext cx="3246120" cy="3840480"/>
+          </a:xfrm>
+          <a:prstGeom prst="roundRect">
+            <a:avLst>
+              <a:gd name="adj" fmla="val 8000"/>
+            </a:avLst>
+          </a:prstGeom>
+          <a:solidFill>
+            <a:srgbClr val="F2F2F2"/>
+          </a:solidFill>
+          <a:ln>
+            <a:noFill/>
+          </a:ln>
+          <a:effectLst/>
+        </p:spPr>
+        <p:style>
+          <a:lnRef idx="1">
+            <a:schemeClr val="accent1"/>
+          </a:lnRef>
+          <a:fillRef idx="3">
+            <a:schemeClr val="accent1"/>
+          </a:fillRef>
+          <a:effectRef idx="2">
+            <a:schemeClr val="accent1"/>
+          </a:effectRef>
+          <a:fontRef idx="minor">
+            <a:schemeClr val="lt1"/>
+          </a:fontRef>
+        </p:style>
+        <p:txBody>
+          <a:bodyPr rtlCol="0" anchor="t" lIns="128016" rIns="128016" tIns="91440" bIns="54864" wrap="square"/>
+          <a:lstStyle/>
+          <a:p>
+            <a:pPr algn="l">
+              <a:spcAft>
+                <a:spcPts val="300"/>
+              </a:spcAft>
+            </a:pPr>
+            <a:r>
+              <a:rPr sz="1200" b="1" i="0">
+                <a:solidFill>
+                  <a:srgbClr val="006E96"/>
+                </a:solidFill>
+                <a:latin typeface="Arial"/>
+              </a:rPr>
+              <a:t>THE AI RETURNS</a:t>
+            </a:r>
+          </a:p>
+          <a:p>
+            <a:pPr algn="l">
+              <a:spcAft>
+                <a:spcPts val="300"/>
+              </a:spcAft>
+            </a:pPr>
+            <a:r>
+              <a:rPr sz="1450" b="0" i="0">
+                <a:solidFill>
+                  <a:srgbClr val="1A1A1A"/>
+                </a:solidFill>
+                <a:latin typeface="Arial"/>
+              </a:rPr>
+              <a:t>A four-layer capture template.</a:t>
+            </a:r>
+          </a:p>
+          <a:p>
+            <a:pPr algn="l">
+              <a:spcAft>
+                <a:spcPts val="300"/>
+              </a:spcAft>
+            </a:pPr>
+            <a:r>
+              <a:rPr sz="1450" b="0" i="0">
+                <a:solidFill>
+                  <a:srgbClr val="1A1A1A"/>
+                </a:solidFill>
+                <a:latin typeface="Arial"/>
+              </a:rPr>
+              <a:t>The right questions per layer.</a:t>
+            </a:r>
+          </a:p>
+          <a:p>
+            <a:pPr algn="l">
+              <a:spcAft>
+                <a:spcPts val="300"/>
+              </a:spcAft>
+            </a:pPr>
+            <a:r>
+              <a:rPr sz="1450" b="0" i="0">
+                <a:solidFill>
+                  <a:srgbClr val="1A1A1A"/>
+                </a:solidFill>
+                <a:latin typeface="Arial"/>
+              </a:rPr>
+              <a:t>A describe-don't-recommend reminder.</a:t>
+            </a:r>
+          </a:p>
+          <a:p>
+            <a:pPr algn="l">
+              <a:spcAft>
+                <a:spcPts val="300"/>
+              </a:spcAft>
+            </a:pPr>
+            <a:r>
+              <a:rPr sz="1450" b="0" i="0">
+                <a:solidFill>
+                  <a:srgbClr val="1A1A1A"/>
+                </a:solidFill>
+                <a:latin typeface="Arial"/>
+              </a:rPr>
+              <a:t>A column for where each answer came from.</a:t>
+            </a:r>
+          </a:p>
+        </p:txBody>
+      </p:sp>
+      <p:sp>
+        <p:nvSpPr>
+          <p:cNvPr id="6" name="Rounded Rectangle 5"/>
+          <p:cNvSpPr/>
+          <p:nvPr/>
+        </p:nvSpPr>
+        <p:spPr>
+          <a:xfrm>
+            <a:off x="8284464" y="1645920"/>
+            <a:ext cx="3246120" cy="3840480"/>
+          </a:xfrm>
+          <a:prstGeom prst="roundRect">
+            <a:avLst>
+              <a:gd name="adj" fmla="val 8000"/>
+            </a:avLst>
+          </a:prstGeom>
+          <a:solidFill>
+            <a:srgbClr val="006E96"/>
+          </a:solidFill>
+          <a:ln>
+            <a:noFill/>
+          </a:ln>
+          <a:effectLst/>
+        </p:spPr>
+        <p:style>
+          <a:lnRef idx="1">
+            <a:schemeClr val="accent1"/>
+          </a:lnRef>
+          <a:fillRef idx="3">
+            <a:schemeClr val="accent1"/>
+          </a:fillRef>
+          <a:effectRef idx="2">
+            <a:schemeClr val="accent1"/>
+          </a:effectRef>
+          <a:fontRef idx="minor">
+            <a:schemeClr val="lt1"/>
+          </a:fontRef>
+        </p:style>
+        <p:txBody>
+          <a:bodyPr rtlCol="0" anchor="t" lIns="128016" rIns="128016" tIns="91440" bIns="54864" wrap="square"/>
+          <a:lstStyle/>
+          <a:p>
+            <a:pPr algn="l">
+              <a:spcAft>
+                <a:spcPts val="300"/>
+              </a:spcAft>
+            </a:pPr>
+            <a:r>
+              <a:rPr sz="1200" b="1" i="0">
+                <a:solidFill>
+                  <a:srgbClr val="FFFFFF"/>
+                </a:solidFill>
+                <a:latin typeface="Arial"/>
+              </a:rPr>
+              <a:t>YOU DECIDE</a:t>
+            </a:r>
+          </a:p>
+          <a:p>
+            <a:pPr algn="l">
+              <a:spcAft>
+                <a:spcPts val="300"/>
+              </a:spcAft>
+            </a:pPr>
+            <a:r>
+              <a:rPr sz="1450" b="0" i="0">
+                <a:solidFill>
+                  <a:srgbClr val="FFFFFF"/>
+                </a:solidFill>
+                <a:latin typeface="Arial"/>
+              </a:rPr>
+              <a:t>Ask the questions.</a:t>
+            </a:r>
+          </a:p>
+          <a:p>
+            <a:pPr algn="l">
+              <a:spcAft>
+                <a:spcPts val="300"/>
+              </a:spcAft>
+            </a:pPr>
+            <a:r>
+              <a:rPr sz="1450" b="0" i="0">
+                <a:solidFill>
+                  <a:srgbClr val="FFFFFF"/>
+                </a:solidFill>
+                <a:latin typeface="Arial"/>
+              </a:rPr>
+              <a:t>Record the real answers.</a:t>
+            </a:r>
+          </a:p>
+          <a:p>
+            <a:pPr algn="l">
+              <a:spcAft>
+                <a:spcPts val="300"/>
+              </a:spcAft>
+            </a:pPr>
+            <a:r>
+              <a:rPr sz="1450" b="0" i="0">
+                <a:solidFill>
+                  <a:srgbClr val="FFFFFF"/>
+                </a:solidFill>
+                <a:latin typeface="Arial"/>
+              </a:rPr>
+              <a:t>The template is a structure, never the findings.</a:t>
+            </a:r>
+          </a:p>
+        </p:txBody>
+      </p:sp>
+      <p:cxnSp>
+        <p:nvCxnSpPr>
+          <p:cNvPr id="7" name="Connector 6"/>
+          <p:cNvCxnSpPr/>
+          <p:nvPr/>
+        </p:nvCxnSpPr>
+        <p:spPr>
+          <a:xfrm>
+            <a:off x="3977639" y="3566160"/>
+            <a:ext cx="420625" cy="0"/>
+          </a:xfrm>
+          <a:prstGeom prst="line">
+            <a:avLst/>
+          </a:prstGeom>
+          <a:ln w="25400">
+            <a:solidFill>
+              <a:srgbClr val="006E96"/>
+            </a:solidFill>
+            <a:tailEnd type="triangle" w="med" len="med"/>
+          </a:ln>
+        </p:spPr>
+        <p:style>
+          <a:lnRef idx="2">
+            <a:schemeClr val="accent1"/>
+          </a:lnRef>
+          <a:fillRef idx="0">
+            <a:schemeClr val="accent1"/>
+          </a:fillRef>
+          <a:effectRef idx="1">
+            <a:schemeClr val="accent1"/>
+          </a:effectRef>
+          <a:fontRef idx="minor">
+            <a:schemeClr val="tx1"/>
+          </a:fontRef>
+        </p:style>
+      </p:cxnSp>
+      <p:cxnSp>
+        <p:nvCxnSpPr>
+          <p:cNvPr id="8" name="Connector 7"/>
+          <p:cNvCxnSpPr/>
+          <p:nvPr/>
+        </p:nvCxnSpPr>
+        <p:spPr>
+          <a:xfrm>
+            <a:off x="7790688" y="3566160"/>
+            <a:ext cx="420624" cy="0"/>
+          </a:xfrm>
+          <a:prstGeom prst="line">
+            <a:avLst/>
+          </a:prstGeom>
+          <a:ln w="25400">
+            <a:solidFill>
+              <a:srgbClr val="006E96"/>
+            </a:solidFill>
+            <a:tailEnd type="triangle" w="med" len="med"/>
+          </a:ln>
+        </p:spPr>
+        <p:style>
+          <a:lnRef idx="2">
+            <a:schemeClr val="accent1"/>
+          </a:lnRef>
+          <a:fillRef idx="0">
+            <a:schemeClr val="accent1"/>
+          </a:fillRef>
+          <a:effectRef idx="1">
+            <a:schemeClr val="accent1"/>
+          </a:effectRef>
+          <a:fontRef idx="minor">
+            <a:schemeClr val="tx1"/>
+          </a:fontRef>
+        </p:style>
+      </p:cxnSp>
+      <p:sp>
+        <p:nvSpPr>
+          <p:cNvPr id="9" name="TextBox 8"/>
           <p:cNvSpPr txBox="1"/>
           <p:nvPr/>
         </p:nvSpPr>
         <p:spPr>
           <a:xfrm>
-            <a:off x="859536" y="4626864"/>
-            <a:ext cx="10479024" cy="1051560"/>
+            <a:off x="658368" y="5760720"/>
+            <a:ext cx="10881360" cy="548640"/>
           </a:xfrm>
           <a:prstGeom prst="rect">
             <a:avLst/>
@@ -15954,13 +16268,8 @@
           </a:bodyPr>
           <a:lstStyle/>
           <a:p>
-            <a:pPr>
-              <a:spcAft>
-                <a:spcPts val="700"/>
-              </a:spcAft>
-            </a:pPr>
-            <a:r>
-              <a:rPr sz="2300" b="1" i="0">
+            <a:r>
+              <a:rPr sz="1550" b="1" i="0">
                 <a:solidFill>
                   <a:srgbClr val="006E96"/>
                 </a:solidFill>
@@ -15973,7 +16282,7 @@
       </p:sp>
       <p:sp>
         <p:nvSpPr>
-          <p:cNvPr id="7" name="TextBox 6"/>
+          <p:cNvPr id="10" name="TextBox 9"/>
           <p:cNvSpPr txBox="1"/>
           <p:nvPr/>
         </p:nvSpPr>
@@ -16103,73 +16412,18 @@
       </p:sp>
       <p:sp>
         <p:nvSpPr>
-          <p:cNvPr id="4" name="TextBox 3"/>
-          <p:cNvSpPr txBox="1"/>
-          <p:nvPr/>
-        </p:nvSpPr>
-        <p:spPr>
-          <a:xfrm>
-            <a:off x="658368" y="1600200"/>
-            <a:ext cx="10881360" cy="2651760"/>
-          </a:xfrm>
-          <a:prstGeom prst="rect">
-            <a:avLst/>
-          </a:prstGeom>
-          <a:noFill/>
-        </p:spPr>
-        <p:txBody>
-          <a:bodyPr wrap="square">
-            <a:spAutoFit/>
-          </a:bodyPr>
-          <a:lstStyle/>
-          <a:p>
-            <a:pPr>
-              <a:spcAft>
-                <a:spcPts val="1200"/>
-              </a:spcAft>
-            </a:pPr>
-            <a:r>
-              <a:rPr sz="2000" b="0" i="0">
-                <a:solidFill>
-                  <a:srgbClr val="1A1A1A"/>
-                </a:solidFill>
-                <a:latin typeface="Arial"/>
-              </a:rPr>
-              <a:t>After Discovery you paste the findings back in. On a sector like Progressa's education system the AI scores the capabilities — register a learner low, certify a result high — scans for the four common gaps, and ranks them by impact and effort.</a:t>
-            </a:r>
-          </a:p>
-          <a:p>
-            <a:pPr>
-              <a:spcAft>
-                <a:spcPts val="1200"/>
-              </a:spcAft>
-            </a:pPr>
-            <a:r>
-              <a:rPr sz="2000" b="0" i="0">
-                <a:solidFill>
-                  <a:srgbClr val="1A1A1A"/>
-                </a:solidFill>
-                <a:latin typeface="Arial"/>
-              </a:rPr>
-              <a:t>And, crucially, it flags the gaps that involve a powerful body for honest handling.</a:t>
-            </a:r>
-          </a:p>
-        </p:txBody>
-      </p:sp>
-      <p:sp>
-        <p:nvSpPr>
-          <p:cNvPr id="5" name="Rounded Rectangle 4"/>
+          <p:cNvPr id="4" name="Rounded Rectangle 3"/>
           <p:cNvSpPr/>
           <p:nvPr/>
         </p:nvSpPr>
         <p:spPr>
           <a:xfrm>
-            <a:off x="658368" y="4434840"/>
-            <a:ext cx="10881360" cy="1325880"/>
+            <a:off x="658368" y="1645920"/>
+            <a:ext cx="3246120" cy="3840480"/>
           </a:xfrm>
           <a:prstGeom prst="roundRect">
             <a:avLst>
-              <a:gd name="adj" fmla="val 4500"/>
+              <a:gd name="adj" fmla="val 8000"/>
             </a:avLst>
           </a:prstGeom>
           <a:solidFill>
@@ -16195,23 +16449,354 @@
           </a:fontRef>
         </p:style>
         <p:txBody>
-          <a:bodyPr rtlCol="0" anchor="ctr"/>
-          <a:lstStyle/>
-          <a:p>
-            <a:pPr algn="ctr"/>
-          </a:p>
-        </p:txBody>
-      </p:sp>
-      <p:sp>
-        <p:nvSpPr>
-          <p:cNvPr id="6" name="TextBox 5"/>
+          <a:bodyPr rtlCol="0" anchor="t" lIns="128016" rIns="128016" tIns="91440" bIns="54864" wrap="square"/>
+          <a:lstStyle/>
+          <a:p>
+            <a:pPr algn="l">
+              <a:spcAft>
+                <a:spcPts val="300"/>
+              </a:spcAft>
+            </a:pPr>
+            <a:r>
+              <a:rPr sz="1200" b="1" i="0">
+                <a:solidFill>
+                  <a:srgbClr val="006E96"/>
+                </a:solidFill>
+                <a:latin typeface="Arial"/>
+              </a:rPr>
+              <a:t>YOU PASTE</a:t>
+            </a:r>
+          </a:p>
+          <a:p>
+            <a:pPr algn="l">
+              <a:spcAft>
+                <a:spcPts val="300"/>
+              </a:spcAft>
+            </a:pPr>
+            <a:r>
+              <a:rPr sz="1450" b="0" i="0">
+                <a:solidFill>
+                  <a:srgbClr val="1A1A1A"/>
+                </a:solidFill>
+                <a:latin typeface="Arial"/>
+              </a:rPr>
+              <a:t>Your Discovery findings.</a:t>
+            </a:r>
+          </a:p>
+        </p:txBody>
+      </p:sp>
+      <p:sp>
+        <p:nvSpPr>
+          <p:cNvPr id="5" name="Rounded Rectangle 4"/>
+          <p:cNvSpPr/>
+          <p:nvPr/>
+        </p:nvSpPr>
+        <p:spPr>
+          <a:xfrm>
+            <a:off x="4471416" y="1645920"/>
+            <a:ext cx="3246120" cy="3840480"/>
+          </a:xfrm>
+          <a:prstGeom prst="roundRect">
+            <a:avLst>
+              <a:gd name="adj" fmla="val 8000"/>
+            </a:avLst>
+          </a:prstGeom>
+          <a:solidFill>
+            <a:srgbClr val="F2F2F2"/>
+          </a:solidFill>
+          <a:ln>
+            <a:noFill/>
+          </a:ln>
+          <a:effectLst/>
+        </p:spPr>
+        <p:style>
+          <a:lnRef idx="1">
+            <a:schemeClr val="accent1"/>
+          </a:lnRef>
+          <a:fillRef idx="3">
+            <a:schemeClr val="accent1"/>
+          </a:fillRef>
+          <a:effectRef idx="2">
+            <a:schemeClr val="accent1"/>
+          </a:effectRef>
+          <a:fontRef idx="minor">
+            <a:schemeClr val="lt1"/>
+          </a:fontRef>
+        </p:style>
+        <p:txBody>
+          <a:bodyPr rtlCol="0" anchor="t" lIns="128016" rIns="128016" tIns="91440" bIns="54864" wrap="square"/>
+          <a:lstStyle/>
+          <a:p>
+            <a:pPr algn="l">
+              <a:spcAft>
+                <a:spcPts val="300"/>
+              </a:spcAft>
+            </a:pPr>
+            <a:r>
+              <a:rPr sz="1200" b="1" i="0">
+                <a:solidFill>
+                  <a:srgbClr val="006E96"/>
+                </a:solidFill>
+                <a:latin typeface="Arial"/>
+              </a:rPr>
+              <a:t>THE AI RETURNS</a:t>
+            </a:r>
+          </a:p>
+          <a:p>
+            <a:pPr algn="l">
+              <a:spcAft>
+                <a:spcPts val="300"/>
+              </a:spcAft>
+            </a:pPr>
+            <a:r>
+              <a:rPr sz="1450" b="0" i="0">
+                <a:solidFill>
+                  <a:srgbClr val="1A1A1A"/>
+                </a:solidFill>
+                <a:latin typeface="Arial"/>
+              </a:rPr>
+              <a:t>Capability maturity scored.</a:t>
+            </a:r>
+          </a:p>
+          <a:p>
+            <a:pPr algn="l">
+              <a:spcAft>
+                <a:spcPts val="300"/>
+              </a:spcAft>
+            </a:pPr>
+            <a:r>
+              <a:rPr sz="1450" b="0" i="0">
+                <a:solidFill>
+                  <a:srgbClr val="1A1A1A"/>
+                </a:solidFill>
+                <a:latin typeface="Arial"/>
+              </a:rPr>
+              <a:t>The four common gaps, found.</a:t>
+            </a:r>
+          </a:p>
+          <a:p>
+            <a:pPr algn="l">
+              <a:spcAft>
+                <a:spcPts val="300"/>
+              </a:spcAft>
+            </a:pPr>
+            <a:r>
+              <a:rPr sz="1450" b="0" i="0">
+                <a:solidFill>
+                  <a:srgbClr val="1A1A1A"/>
+                </a:solidFill>
+                <a:latin typeface="Arial"/>
+              </a:rPr>
+              <a:t>Ranked by impact and effort.</a:t>
+            </a:r>
+          </a:p>
+          <a:p>
+            <a:pPr algn="l">
+              <a:spcAft>
+                <a:spcPts val="300"/>
+              </a:spcAft>
+            </a:pPr>
+            <a:r>
+              <a:rPr sz="1450" b="0" i="0">
+                <a:solidFill>
+                  <a:srgbClr val="1A1A1A"/>
+                </a:solidFill>
+                <a:latin typeface="Arial"/>
+              </a:rPr>
+              <a:t>Politically sensitive gaps flagged.</a:t>
+            </a:r>
+          </a:p>
+        </p:txBody>
+      </p:sp>
+      <p:sp>
+        <p:nvSpPr>
+          <p:cNvPr id="6" name="Rounded Rectangle 5"/>
+          <p:cNvSpPr/>
+          <p:nvPr/>
+        </p:nvSpPr>
+        <p:spPr>
+          <a:xfrm>
+            <a:off x="8284464" y="1645920"/>
+            <a:ext cx="3246120" cy="3840480"/>
+          </a:xfrm>
+          <a:prstGeom prst="roundRect">
+            <a:avLst>
+              <a:gd name="adj" fmla="val 8000"/>
+            </a:avLst>
+          </a:prstGeom>
+          <a:solidFill>
+            <a:srgbClr val="006E96"/>
+          </a:solidFill>
+          <a:ln>
+            <a:noFill/>
+          </a:ln>
+          <a:effectLst/>
+        </p:spPr>
+        <p:style>
+          <a:lnRef idx="1">
+            <a:schemeClr val="accent1"/>
+          </a:lnRef>
+          <a:fillRef idx="3">
+            <a:schemeClr val="accent1"/>
+          </a:fillRef>
+          <a:effectRef idx="2">
+            <a:schemeClr val="accent1"/>
+          </a:effectRef>
+          <a:fontRef idx="minor">
+            <a:schemeClr val="lt1"/>
+          </a:fontRef>
+        </p:style>
+        <p:txBody>
+          <a:bodyPr rtlCol="0" anchor="t" lIns="128016" rIns="128016" tIns="91440" bIns="54864" wrap="square"/>
+          <a:lstStyle/>
+          <a:p>
+            <a:pPr algn="l">
+              <a:spcAft>
+                <a:spcPts val="300"/>
+              </a:spcAft>
+            </a:pPr>
+            <a:r>
+              <a:rPr sz="1200" b="1" i="0">
+                <a:solidFill>
+                  <a:srgbClr val="FFFFFF"/>
+                </a:solidFill>
+                <a:latin typeface="Arial"/>
+              </a:rPr>
+              <a:t>YOU DECIDE</a:t>
+            </a:r>
+          </a:p>
+          <a:p>
+            <a:pPr algn="l">
+              <a:spcAft>
+                <a:spcPts val="300"/>
+              </a:spcAft>
+            </a:pPr>
+            <a:r>
+              <a:rPr sz="1450" b="0" i="0">
+                <a:solidFill>
+                  <a:srgbClr val="FFFFFF"/>
+                </a:solidFill>
+                <a:latin typeface="Arial"/>
+              </a:rPr>
+              <a:t>Check the ground truth.</a:t>
+            </a:r>
+          </a:p>
+          <a:p>
+            <a:pPr algn="l">
+              <a:spcAft>
+                <a:spcPts val="300"/>
+              </a:spcAft>
+            </a:pPr>
+            <a:r>
+              <a:rPr sz="1450" b="0" i="0">
+                <a:solidFill>
+                  <a:srgbClr val="FFFFFF"/>
+                </a:solidFill>
+                <a:latin typeface="Arial"/>
+              </a:rPr>
+              <a:t>Defend the ranking.</a:t>
+            </a:r>
+          </a:p>
+          <a:p>
+            <a:pPr algn="l">
+              <a:spcAft>
+                <a:spcPts val="300"/>
+              </a:spcAft>
+            </a:pPr>
+            <a:r>
+              <a:rPr sz="1450" b="0" i="0">
+                <a:solidFill>
+                  <a:srgbClr val="FFFFFF"/>
+                </a:solidFill>
+                <a:latin typeface="Arial"/>
+              </a:rPr>
+              <a:t>Decide how to handle the flagged gap.</a:t>
+            </a:r>
+          </a:p>
+        </p:txBody>
+      </p:sp>
+      <p:cxnSp>
+        <p:nvCxnSpPr>
+          <p:cNvPr id="7" name="Connector 6"/>
+          <p:cNvCxnSpPr/>
+          <p:nvPr/>
+        </p:nvCxnSpPr>
+        <p:spPr>
+          <a:xfrm>
+            <a:off x="3977639" y="3566160"/>
+            <a:ext cx="420625" cy="0"/>
+          </a:xfrm>
+          <a:prstGeom prst="line">
+            <a:avLst/>
+          </a:prstGeom>
+          <a:ln w="25400">
+            <a:solidFill>
+              <a:srgbClr val="006E96"/>
+            </a:solidFill>
+            <a:tailEnd type="triangle" w="med" len="med"/>
+          </a:ln>
+        </p:spPr>
+        <p:style>
+          <a:lnRef idx="2">
+            <a:schemeClr val="accent1"/>
+          </a:lnRef>
+          <a:fillRef idx="0">
+            <a:schemeClr val="accent1"/>
+          </a:fillRef>
+          <a:effectRef idx="1">
+            <a:schemeClr val="accent1"/>
+          </a:effectRef>
+          <a:fontRef idx="minor">
+            <a:schemeClr val="tx1"/>
+          </a:fontRef>
+        </p:style>
+      </p:cxnSp>
+      <p:cxnSp>
+        <p:nvCxnSpPr>
+          <p:cNvPr id="8" name="Connector 7"/>
+          <p:cNvCxnSpPr/>
+          <p:nvPr/>
+        </p:nvCxnSpPr>
+        <p:spPr>
+          <a:xfrm>
+            <a:off x="7790688" y="3566160"/>
+            <a:ext cx="420624" cy="0"/>
+          </a:xfrm>
+          <a:prstGeom prst="line">
+            <a:avLst/>
+          </a:prstGeom>
+          <a:ln w="25400">
+            <a:solidFill>
+              <a:srgbClr val="006E96"/>
+            </a:solidFill>
+            <a:tailEnd type="triangle" w="med" len="med"/>
+          </a:ln>
+        </p:spPr>
+        <p:style>
+          <a:lnRef idx="2">
+            <a:schemeClr val="accent1"/>
+          </a:lnRef>
+          <a:fillRef idx="0">
+            <a:schemeClr val="accent1"/>
+          </a:fillRef>
+          <a:effectRef idx="1">
+            <a:schemeClr val="accent1"/>
+          </a:effectRef>
+          <a:fontRef idx="minor">
+            <a:schemeClr val="tx1"/>
+          </a:fontRef>
+        </p:style>
+      </p:cxnSp>
+      <p:sp>
+        <p:nvSpPr>
+          <p:cNvPr id="9" name="TextBox 8"/>
           <p:cNvSpPr txBox="1"/>
           <p:nvPr/>
         </p:nvSpPr>
         <p:spPr>
           <a:xfrm>
-            <a:off x="859536" y="4626864"/>
-            <a:ext cx="10479024" cy="1051560"/>
+            <a:off x="658368" y="5760720"/>
+            <a:ext cx="10881360" cy="548640"/>
           </a:xfrm>
           <a:prstGeom prst="rect">
             <a:avLst/>
@@ -16224,13 +16809,8 @@
           </a:bodyPr>
           <a:lstStyle/>
           <a:p>
-            <a:pPr>
-              <a:spcAft>
-                <a:spcPts val="700"/>
-              </a:spcAft>
-            </a:pPr>
-            <a:r>
-              <a:rPr sz="2300" b="1" i="0">
+            <a:r>
+              <a:rPr sz="1550" b="1" i="0">
                 <a:solidFill>
                   <a:srgbClr val="006E96"/>
                 </a:solidFill>
@@ -16243,7 +16823,7 @@
       </p:sp>
       <p:sp>
         <p:nvSpPr>
-          <p:cNvPr id="7" name="TextBox 6"/>
+          <p:cNvPr id="10" name="TextBox 9"/>
           <p:cNvSpPr txBox="1"/>
           <p:nvPr/>
         </p:nvSpPr>
@@ -16810,7 +17390,7 @@
         <p:spPr>
           <a:xfrm>
             <a:off x="658368" y="1600200"/>
-            <a:ext cx="10881360" cy="2651760"/>
+            <a:ext cx="10881360" cy="1984248"/>
           </a:xfrm>
           <a:prstGeom prst="rect">
             <a:avLst/>
@@ -16864,7 +17444,7 @@
         </p:nvSpPr>
         <p:spPr>
           <a:xfrm>
-            <a:off x="658368" y="4434840"/>
+            <a:off x="658368" y="3767328"/>
             <a:ext cx="10881360" cy="1325880"/>
           </a:xfrm>
           <a:prstGeom prst="roundRect">
@@ -16910,7 +17490,7 @@
         </p:nvSpPr>
         <p:spPr>
           <a:xfrm>
-            <a:off x="859536" y="4626864"/>
+            <a:off x="859536" y="3959352"/>
             <a:ext cx="10479024" cy="1051560"/>
           </a:xfrm>
           <a:prstGeom prst="rect">
@@ -17651,25 +18231,93 @@
       </p:sp>
       <p:sp>
         <p:nvSpPr>
-          <p:cNvPr id="4" name="Rounded Rectangle 3"/>
+          <p:cNvPr id="4" name="TextBox 3"/>
+          <p:cNvSpPr txBox="1"/>
+          <p:nvPr/>
+        </p:nvSpPr>
+        <p:spPr>
+          <a:xfrm>
+            <a:off x="658368" y="1554480"/>
+            <a:ext cx="10881360" cy="329184"/>
+          </a:xfrm>
+          <a:prstGeom prst="rect">
+            <a:avLst/>
+          </a:prstGeom>
+          <a:noFill/>
+        </p:spPr>
+        <p:txBody>
+          <a:bodyPr wrap="square">
+            <a:spAutoFit/>
+          </a:bodyPr>
+          <a:lstStyle/>
+          <a:p>
+            <a:r>
+              <a:rPr sz="1200" b="1" i="0">
+                <a:solidFill>
+                  <a:srgbClr val="595959"/>
+                </a:solidFill>
+                <a:latin typeface="Arial"/>
+              </a:rPr>
+              <a:t>INSIDE ONE PROJECT — the project manager is making the right call, for the project</a:t>
+            </a:r>
+          </a:p>
+        </p:txBody>
+      </p:sp>
+      <p:sp>
+        <p:nvSpPr>
+          <p:cNvPr id="5" name="TextBox 4"/>
+          <p:cNvSpPr txBox="1"/>
+          <p:nvPr/>
+        </p:nvSpPr>
+        <p:spPr>
+          <a:xfrm>
+            <a:off x="658368" y="1938528"/>
+            <a:ext cx="2377440" cy="548640"/>
+          </a:xfrm>
+          <a:prstGeom prst="rect">
+            <a:avLst/>
+          </a:prstGeom>
+          <a:noFill/>
+        </p:spPr>
+        <p:txBody>
+          <a:bodyPr wrap="square" anchor="ctr">
+            <a:spAutoFit/>
+          </a:bodyPr>
+          <a:lstStyle/>
+          <a:p>
+            <a:r>
+              <a:rPr sz="1400" b="1" i="0">
+                <a:solidFill>
+                  <a:srgbClr val="1A1A1A"/>
+                </a:solidFill>
+                <a:latin typeface="Arial"/>
+              </a:rPr>
+              <a:t>Build its own</a:t>
+            </a:r>
+          </a:p>
+        </p:txBody>
+      </p:sp>
+      <p:sp>
+        <p:nvSpPr>
+          <p:cNvPr id="6" name="Rectangle 5"/>
           <p:cNvSpPr/>
           <p:nvPr/>
         </p:nvSpPr>
         <p:spPr>
           <a:xfrm>
-            <a:off x="658368" y="1554480"/>
-            <a:ext cx="5394960" cy="3977639"/>
-          </a:xfrm>
-          <a:prstGeom prst="roundRect">
-            <a:avLst>
-              <a:gd name="adj" fmla="val 4500"/>
-            </a:avLst>
+            <a:off x="3172968" y="1993392"/>
+            <a:ext cx="1813255" cy="438912"/>
+          </a:xfrm>
+          <a:prstGeom prst="rect">
+            <a:avLst/>
           </a:prstGeom>
           <a:solidFill>
-            <a:srgbClr val="E5F5FB"/>
+            <a:srgbClr val="009CD6"/>
           </a:solidFill>
-          <a:ln>
-            <a:noFill/>
+          <a:ln w="9525">
+            <a:solidFill>
+              <a:srgbClr val="FFFFFF"/>
+            </a:solidFill>
           </a:ln>
           <a:effectLst/>
         </p:spPr>
@@ -17688,23 +18336,32 @@
           </a:fontRef>
         </p:style>
         <p:txBody>
-          <a:bodyPr rtlCol="0" anchor="ctr"/>
+          <a:bodyPr rtlCol="0" anchor="ctr" lIns="54864" rIns="54864" tIns="0" bIns="0" wrap="square"/>
           <a:lstStyle/>
           <a:p>
             <a:pPr algn="ctr"/>
-          </a:p>
-        </p:txBody>
-      </p:sp>
-      <p:sp>
-        <p:nvSpPr>
-          <p:cNvPr id="5" name="TextBox 4"/>
+            <a:r>
+              <a:rPr sz="1100" b="1" i="0">
+                <a:solidFill>
+                  <a:srgbClr val="FFFFFF"/>
+                </a:solidFill>
+                <a:latin typeface="Arial"/>
+              </a:rPr>
+              <a:t>cheaper, faster</a:t>
+            </a:r>
+          </a:p>
+        </p:txBody>
+      </p:sp>
+      <p:sp>
+        <p:nvSpPr>
+          <p:cNvPr id="7" name="TextBox 6"/>
           <p:cNvSpPr txBox="1"/>
           <p:nvPr/>
         </p:nvSpPr>
         <p:spPr>
           <a:xfrm>
-            <a:off x="859536" y="1700784"/>
-            <a:ext cx="4992624" cy="3703320"/>
+            <a:off x="5105095" y="1938528"/>
+            <a:ext cx="6434632" cy="548640"/>
           </a:xfrm>
           <a:prstGeom prst="rect">
             <a:avLst/>
@@ -17712,81 +18369,78 @@
           <a:noFill/>
         </p:spPr>
         <p:txBody>
-          <a:bodyPr wrap="square">
+          <a:bodyPr wrap="square" anchor="ctr">
             <a:spAutoFit/>
           </a:bodyPr>
           <a:lstStyle/>
           <a:p>
-            <a:pPr>
-              <a:spcAft>
-                <a:spcPts val="700"/>
-              </a:spcAft>
-            </a:pPr>
-            <a:r>
-              <a:rPr sz="1900" b="1" i="0">
-                <a:solidFill>
-                  <a:srgbClr val="006E96"/>
-                </a:solidFill>
-                <a:latin typeface="Arial"/>
-              </a:rPr>
-              <a:t>INSIDE ONE PROJECT</a:t>
-            </a:r>
-          </a:p>
-          <a:p>
-            <a:pPr>
-              <a:spcAft>
-                <a:spcPts val="700"/>
-              </a:spcAft>
-            </a:pPr>
-            <a:r>
-              <a:rPr sz="1600" b="0" i="0">
+            <a:r>
+              <a:rPr sz="1200" b="0" i="1">
+                <a:solidFill>
+                  <a:srgbClr val="595959"/>
+                </a:solidFill>
+                <a:latin typeface="Arial"/>
+              </a:rPr>
+              <a:t>so every project builds its own</a:t>
+            </a:r>
+          </a:p>
+        </p:txBody>
+      </p:sp>
+      <p:sp>
+        <p:nvSpPr>
+          <p:cNvPr id="8" name="TextBox 7"/>
+          <p:cNvSpPr txBox="1"/>
+          <p:nvPr/>
+        </p:nvSpPr>
+        <p:spPr>
+          <a:xfrm>
+            <a:off x="658368" y="2761488"/>
+            <a:ext cx="2377440" cy="548640"/>
+          </a:xfrm>
+          <a:prstGeom prst="rect">
+            <a:avLst/>
+          </a:prstGeom>
+          <a:noFill/>
+        </p:spPr>
+        <p:txBody>
+          <a:bodyPr wrap="square" anchor="ctr">
+            <a:spAutoFit/>
+          </a:bodyPr>
+          <a:lstStyle/>
+          <a:p>
+            <a:r>
+              <a:rPr sz="1400" b="1" i="0">
                 <a:solidFill>
                   <a:srgbClr val="1A1A1A"/>
                 </a:solidFill>
                 <a:latin typeface="Arial"/>
               </a:rPr>
-              <a:t>Building its own small identity function is cheaper and faster than reusing the national one.</a:t>
-            </a:r>
-          </a:p>
-          <a:p>
-            <a:pPr>
-              <a:spcAft>
-                <a:spcPts val="700"/>
-              </a:spcAft>
-            </a:pPr>
-            <a:r>
-              <a:rPr sz="1600" b="0" i="0">
-                <a:solidFill>
-                  <a:srgbClr val="1A1A1A"/>
-                </a:solidFill>
-                <a:latin typeface="Arial"/>
-              </a:rPr>
-              <a:t>So every project builds its own.</a:t>
-            </a:r>
-          </a:p>
-        </p:txBody>
-      </p:sp>
-      <p:sp>
-        <p:nvSpPr>
-          <p:cNvPr id="6" name="Rounded Rectangle 5"/>
+              <a:t>Reuse the national one</a:t>
+            </a:r>
+          </a:p>
+        </p:txBody>
+      </p:sp>
+      <p:sp>
+        <p:nvSpPr>
+          <p:cNvPr id="9" name="Rectangle 8"/>
           <p:cNvSpPr/>
           <p:nvPr/>
         </p:nvSpPr>
         <p:spPr>
           <a:xfrm>
-            <a:off x="6263640" y="1554480"/>
-            <a:ext cx="5394960" cy="3977639"/>
-          </a:xfrm>
-          <a:prstGeom prst="roundRect">
-            <a:avLst>
-              <a:gd name="adj" fmla="val 4500"/>
-            </a:avLst>
+            <a:off x="3172968" y="2816352"/>
+            <a:ext cx="2817266" cy="438912"/>
+          </a:xfrm>
+          <a:prstGeom prst="rect">
+            <a:avLst/>
           </a:prstGeom>
           <a:solidFill>
             <a:srgbClr val="F2F2F2"/>
           </a:solidFill>
-          <a:ln>
-            <a:noFill/>
+          <a:ln w="9525">
+            <a:solidFill>
+              <a:srgbClr val="FFFFFF"/>
+            </a:solidFill>
           </a:ln>
           <a:effectLst/>
         </p:spPr>
@@ -17805,23 +18459,32 @@
           </a:fontRef>
         </p:style>
         <p:txBody>
-          <a:bodyPr rtlCol="0" anchor="ctr"/>
+          <a:bodyPr rtlCol="0" anchor="ctr" lIns="54864" rIns="54864" tIns="0" bIns="0" wrap="square"/>
           <a:lstStyle/>
           <a:p>
             <a:pPr algn="ctr"/>
-          </a:p>
-        </p:txBody>
-      </p:sp>
-      <p:sp>
-        <p:nvSpPr>
-          <p:cNvPr id="7" name="TextBox 6"/>
+            <a:r>
+              <a:rPr sz="1100" b="1" i="0">
+                <a:solidFill>
+                  <a:srgbClr val="1A1A1A"/>
+                </a:solidFill>
+                <a:latin typeface="Arial"/>
+              </a:rPr>
+              <a:t>learn it · negotiate · wait</a:t>
+            </a:r>
+          </a:p>
+        </p:txBody>
+      </p:sp>
+      <p:sp>
+        <p:nvSpPr>
+          <p:cNvPr id="10" name="TextBox 9"/>
           <p:cNvSpPr txBox="1"/>
           <p:nvPr/>
         </p:nvSpPr>
         <p:spPr>
           <a:xfrm>
-            <a:off x="6464808" y="1700784"/>
-            <a:ext cx="4992624" cy="3703320"/>
+            <a:off x="658368" y="3584448"/>
+            <a:ext cx="10881360" cy="329184"/>
           </a:xfrm>
           <a:prstGeom prst="rect">
             <a:avLst/>
@@ -17834,64 +18497,733 @@
           </a:bodyPr>
           <a:lstStyle/>
           <a:p>
-            <a:pPr>
-              <a:spcAft>
-                <a:spcPts val="700"/>
-              </a:spcAft>
-            </a:pPr>
-            <a:r>
-              <a:rPr sz="1900" b="1" i="0">
+            <a:r>
+              <a:rPr sz="1200" b="1" i="0">
+                <a:solidFill>
+                  <a:srgbClr val="595959"/>
+                </a:solidFill>
+                <a:latin typeface="Arial"/>
+              </a:rPr>
+              <a:t>ACROSS TEN PROJECTS — the column no single project ever sees</a:t>
+            </a:r>
+          </a:p>
+        </p:txBody>
+      </p:sp>
+      <p:sp>
+        <p:nvSpPr>
+          <p:cNvPr id="11" name="TextBox 10"/>
+          <p:cNvSpPr txBox="1"/>
+          <p:nvPr/>
+        </p:nvSpPr>
+        <p:spPr>
+          <a:xfrm>
+            <a:off x="658368" y="3968496"/>
+            <a:ext cx="2377440" cy="548640"/>
+          </a:xfrm>
+          <a:prstGeom prst="rect">
+            <a:avLst/>
+          </a:prstGeom>
+          <a:noFill/>
+        </p:spPr>
+        <p:txBody>
+          <a:bodyPr wrap="square" anchor="ctr">
+            <a:spAutoFit/>
+          </a:bodyPr>
+          <a:lstStyle/>
+          <a:p>
+            <a:r>
+              <a:rPr sz="1400" b="1" i="0">
+                <a:solidFill>
+                  <a:srgbClr val="1A1A1A"/>
+                </a:solidFill>
+                <a:latin typeface="Arial"/>
+              </a:rPr>
+              <a:t>Each builds its own</a:t>
+            </a:r>
+          </a:p>
+        </p:txBody>
+      </p:sp>
+      <p:sp>
+        <p:nvSpPr>
+          <p:cNvPr id="12" name="Rectangle 11"/>
+          <p:cNvSpPr/>
+          <p:nvPr/>
+        </p:nvSpPr>
+        <p:spPr>
+          <a:xfrm>
+            <a:off x="3172968" y="4023359"/>
+            <a:ext cx="683742" cy="438912"/>
+          </a:xfrm>
+          <a:prstGeom prst="rect">
+            <a:avLst/>
+          </a:prstGeom>
+          <a:solidFill>
+            <a:srgbClr val="009CD6"/>
+          </a:solidFill>
+          <a:ln w="9525">
+            <a:solidFill>
+              <a:srgbClr val="FFFFFF"/>
+            </a:solidFill>
+          </a:ln>
+          <a:effectLst/>
+        </p:spPr>
+        <p:style>
+          <a:lnRef idx="1">
+            <a:schemeClr val="accent1"/>
+          </a:lnRef>
+          <a:fillRef idx="3">
+            <a:schemeClr val="accent1"/>
+          </a:fillRef>
+          <a:effectRef idx="2">
+            <a:schemeClr val="accent1"/>
+          </a:effectRef>
+          <a:fontRef idx="minor">
+            <a:schemeClr val="lt1"/>
+          </a:fontRef>
+        </p:style>
+        <p:txBody>
+          <a:bodyPr rtlCol="0" anchor="ctr"/>
+          <a:lstStyle/>
+          <a:p>
+            <a:pPr algn="ctr"/>
+          </a:p>
+        </p:txBody>
+      </p:sp>
+      <p:sp>
+        <p:nvSpPr>
+          <p:cNvPr id="13" name="Rectangle 12"/>
+          <p:cNvSpPr/>
+          <p:nvPr/>
+        </p:nvSpPr>
+        <p:spPr>
+          <a:xfrm>
+            <a:off x="3884142" y="4023359"/>
+            <a:ext cx="683742" cy="438912"/>
+          </a:xfrm>
+          <a:prstGeom prst="rect">
+            <a:avLst/>
+          </a:prstGeom>
+          <a:solidFill>
+            <a:srgbClr val="009CD6"/>
+          </a:solidFill>
+          <a:ln w="9525">
+            <a:solidFill>
+              <a:srgbClr val="FFFFFF"/>
+            </a:solidFill>
+          </a:ln>
+          <a:effectLst/>
+        </p:spPr>
+        <p:style>
+          <a:lnRef idx="1">
+            <a:schemeClr val="accent1"/>
+          </a:lnRef>
+          <a:fillRef idx="3">
+            <a:schemeClr val="accent1"/>
+          </a:fillRef>
+          <a:effectRef idx="2">
+            <a:schemeClr val="accent1"/>
+          </a:effectRef>
+          <a:fontRef idx="minor">
+            <a:schemeClr val="lt1"/>
+          </a:fontRef>
+        </p:style>
+        <p:txBody>
+          <a:bodyPr rtlCol="0" anchor="ctr"/>
+          <a:lstStyle/>
+          <a:p>
+            <a:pPr algn="ctr"/>
+          </a:p>
+        </p:txBody>
+      </p:sp>
+      <p:sp>
+        <p:nvSpPr>
+          <p:cNvPr id="14" name="Rectangle 13"/>
+          <p:cNvSpPr/>
+          <p:nvPr/>
+        </p:nvSpPr>
+        <p:spPr>
+          <a:xfrm>
+            <a:off x="4595317" y="4023359"/>
+            <a:ext cx="683742" cy="438912"/>
+          </a:xfrm>
+          <a:prstGeom prst="rect">
+            <a:avLst/>
+          </a:prstGeom>
+          <a:solidFill>
+            <a:srgbClr val="009CD6"/>
+          </a:solidFill>
+          <a:ln w="9525">
+            <a:solidFill>
+              <a:srgbClr val="FFFFFF"/>
+            </a:solidFill>
+          </a:ln>
+          <a:effectLst/>
+        </p:spPr>
+        <p:style>
+          <a:lnRef idx="1">
+            <a:schemeClr val="accent1"/>
+          </a:lnRef>
+          <a:fillRef idx="3">
+            <a:schemeClr val="accent1"/>
+          </a:fillRef>
+          <a:effectRef idx="2">
+            <a:schemeClr val="accent1"/>
+          </a:effectRef>
+          <a:fontRef idx="minor">
+            <a:schemeClr val="lt1"/>
+          </a:fontRef>
+        </p:style>
+        <p:txBody>
+          <a:bodyPr rtlCol="0" anchor="ctr"/>
+          <a:lstStyle/>
+          <a:p>
+            <a:pPr algn="ctr"/>
+          </a:p>
+        </p:txBody>
+      </p:sp>
+      <p:sp>
+        <p:nvSpPr>
+          <p:cNvPr id="15" name="Rectangle 14"/>
+          <p:cNvSpPr/>
+          <p:nvPr/>
+        </p:nvSpPr>
+        <p:spPr>
+          <a:xfrm>
+            <a:off x="5306491" y="4023359"/>
+            <a:ext cx="683742" cy="438912"/>
+          </a:xfrm>
+          <a:prstGeom prst="rect">
+            <a:avLst/>
+          </a:prstGeom>
+          <a:solidFill>
+            <a:srgbClr val="009CD6"/>
+          </a:solidFill>
+          <a:ln w="9525">
+            <a:solidFill>
+              <a:srgbClr val="FFFFFF"/>
+            </a:solidFill>
+          </a:ln>
+          <a:effectLst/>
+        </p:spPr>
+        <p:style>
+          <a:lnRef idx="1">
+            <a:schemeClr val="accent1"/>
+          </a:lnRef>
+          <a:fillRef idx="3">
+            <a:schemeClr val="accent1"/>
+          </a:fillRef>
+          <a:effectRef idx="2">
+            <a:schemeClr val="accent1"/>
+          </a:effectRef>
+          <a:fontRef idx="minor">
+            <a:schemeClr val="lt1"/>
+          </a:fontRef>
+        </p:style>
+        <p:txBody>
+          <a:bodyPr rtlCol="0" anchor="ctr"/>
+          <a:lstStyle/>
+          <a:p>
+            <a:pPr algn="ctr"/>
+          </a:p>
+        </p:txBody>
+      </p:sp>
+      <p:sp>
+        <p:nvSpPr>
+          <p:cNvPr id="16" name="Rectangle 15"/>
+          <p:cNvSpPr/>
+          <p:nvPr/>
+        </p:nvSpPr>
+        <p:spPr>
+          <a:xfrm>
+            <a:off x="6017666" y="4023359"/>
+            <a:ext cx="683742" cy="438912"/>
+          </a:xfrm>
+          <a:prstGeom prst="rect">
+            <a:avLst/>
+          </a:prstGeom>
+          <a:solidFill>
+            <a:srgbClr val="009CD6"/>
+          </a:solidFill>
+          <a:ln w="9525">
+            <a:solidFill>
+              <a:srgbClr val="FFFFFF"/>
+            </a:solidFill>
+          </a:ln>
+          <a:effectLst/>
+        </p:spPr>
+        <p:style>
+          <a:lnRef idx="1">
+            <a:schemeClr val="accent1"/>
+          </a:lnRef>
+          <a:fillRef idx="3">
+            <a:schemeClr val="accent1"/>
+          </a:fillRef>
+          <a:effectRef idx="2">
+            <a:schemeClr val="accent1"/>
+          </a:effectRef>
+          <a:fontRef idx="minor">
+            <a:schemeClr val="lt1"/>
+          </a:fontRef>
+        </p:style>
+        <p:txBody>
+          <a:bodyPr rtlCol="0" anchor="ctr"/>
+          <a:lstStyle/>
+          <a:p>
+            <a:pPr algn="ctr"/>
+          </a:p>
+        </p:txBody>
+      </p:sp>
+      <p:sp>
+        <p:nvSpPr>
+          <p:cNvPr id="17" name="Rectangle 16"/>
+          <p:cNvSpPr/>
+          <p:nvPr/>
+        </p:nvSpPr>
+        <p:spPr>
+          <a:xfrm>
+            <a:off x="6728841" y="4023359"/>
+            <a:ext cx="683742" cy="438912"/>
+          </a:xfrm>
+          <a:prstGeom prst="rect">
+            <a:avLst/>
+          </a:prstGeom>
+          <a:solidFill>
+            <a:srgbClr val="009CD6"/>
+          </a:solidFill>
+          <a:ln w="9525">
+            <a:solidFill>
+              <a:srgbClr val="FFFFFF"/>
+            </a:solidFill>
+          </a:ln>
+          <a:effectLst/>
+        </p:spPr>
+        <p:style>
+          <a:lnRef idx="1">
+            <a:schemeClr val="accent1"/>
+          </a:lnRef>
+          <a:fillRef idx="3">
+            <a:schemeClr val="accent1"/>
+          </a:fillRef>
+          <a:effectRef idx="2">
+            <a:schemeClr val="accent1"/>
+          </a:effectRef>
+          <a:fontRef idx="minor">
+            <a:schemeClr val="lt1"/>
+          </a:fontRef>
+        </p:style>
+        <p:txBody>
+          <a:bodyPr rtlCol="0" anchor="ctr"/>
+          <a:lstStyle/>
+          <a:p>
+            <a:pPr algn="ctr"/>
+          </a:p>
+        </p:txBody>
+      </p:sp>
+      <p:sp>
+        <p:nvSpPr>
+          <p:cNvPr id="18" name="Rectangle 17"/>
+          <p:cNvSpPr/>
+          <p:nvPr/>
+        </p:nvSpPr>
+        <p:spPr>
+          <a:xfrm>
+            <a:off x="7440015" y="4023359"/>
+            <a:ext cx="683742" cy="438912"/>
+          </a:xfrm>
+          <a:prstGeom prst="rect">
+            <a:avLst/>
+          </a:prstGeom>
+          <a:solidFill>
+            <a:srgbClr val="009CD6"/>
+          </a:solidFill>
+          <a:ln w="9525">
+            <a:solidFill>
+              <a:srgbClr val="FFFFFF"/>
+            </a:solidFill>
+          </a:ln>
+          <a:effectLst/>
+        </p:spPr>
+        <p:style>
+          <a:lnRef idx="1">
+            <a:schemeClr val="accent1"/>
+          </a:lnRef>
+          <a:fillRef idx="3">
+            <a:schemeClr val="accent1"/>
+          </a:fillRef>
+          <a:effectRef idx="2">
+            <a:schemeClr val="accent1"/>
+          </a:effectRef>
+          <a:fontRef idx="minor">
+            <a:schemeClr val="lt1"/>
+          </a:fontRef>
+        </p:style>
+        <p:txBody>
+          <a:bodyPr rtlCol="0" anchor="ctr"/>
+          <a:lstStyle/>
+          <a:p>
+            <a:pPr algn="ctr"/>
+          </a:p>
+        </p:txBody>
+      </p:sp>
+      <p:sp>
+        <p:nvSpPr>
+          <p:cNvPr id="19" name="Rectangle 18"/>
+          <p:cNvSpPr/>
+          <p:nvPr/>
+        </p:nvSpPr>
+        <p:spPr>
+          <a:xfrm>
+            <a:off x="8151190" y="4023359"/>
+            <a:ext cx="683742" cy="438912"/>
+          </a:xfrm>
+          <a:prstGeom prst="rect">
+            <a:avLst/>
+          </a:prstGeom>
+          <a:solidFill>
+            <a:srgbClr val="009CD6"/>
+          </a:solidFill>
+          <a:ln w="9525">
+            <a:solidFill>
+              <a:srgbClr val="FFFFFF"/>
+            </a:solidFill>
+          </a:ln>
+          <a:effectLst/>
+        </p:spPr>
+        <p:style>
+          <a:lnRef idx="1">
+            <a:schemeClr val="accent1"/>
+          </a:lnRef>
+          <a:fillRef idx="3">
+            <a:schemeClr val="accent1"/>
+          </a:fillRef>
+          <a:effectRef idx="2">
+            <a:schemeClr val="accent1"/>
+          </a:effectRef>
+          <a:fontRef idx="minor">
+            <a:schemeClr val="lt1"/>
+          </a:fontRef>
+        </p:style>
+        <p:txBody>
+          <a:bodyPr rtlCol="0" anchor="ctr"/>
+          <a:lstStyle/>
+          <a:p>
+            <a:pPr algn="ctr"/>
+          </a:p>
+        </p:txBody>
+      </p:sp>
+      <p:sp>
+        <p:nvSpPr>
+          <p:cNvPr id="20" name="Rectangle 19"/>
+          <p:cNvSpPr/>
+          <p:nvPr/>
+        </p:nvSpPr>
+        <p:spPr>
+          <a:xfrm>
+            <a:off x="8862364" y="4023359"/>
+            <a:ext cx="683742" cy="438912"/>
+          </a:xfrm>
+          <a:prstGeom prst="rect">
+            <a:avLst/>
+          </a:prstGeom>
+          <a:solidFill>
+            <a:srgbClr val="009CD6"/>
+          </a:solidFill>
+          <a:ln w="9525">
+            <a:solidFill>
+              <a:srgbClr val="FFFFFF"/>
+            </a:solidFill>
+          </a:ln>
+          <a:effectLst/>
+        </p:spPr>
+        <p:style>
+          <a:lnRef idx="1">
+            <a:schemeClr val="accent1"/>
+          </a:lnRef>
+          <a:fillRef idx="3">
+            <a:schemeClr val="accent1"/>
+          </a:fillRef>
+          <a:effectRef idx="2">
+            <a:schemeClr val="accent1"/>
+          </a:effectRef>
+          <a:fontRef idx="minor">
+            <a:schemeClr val="lt1"/>
+          </a:fontRef>
+        </p:style>
+        <p:txBody>
+          <a:bodyPr rtlCol="0" anchor="ctr"/>
+          <a:lstStyle/>
+          <a:p>
+            <a:pPr algn="ctr"/>
+          </a:p>
+        </p:txBody>
+      </p:sp>
+      <p:sp>
+        <p:nvSpPr>
+          <p:cNvPr id="21" name="Rectangle 20"/>
+          <p:cNvSpPr/>
+          <p:nvPr/>
+        </p:nvSpPr>
+        <p:spPr>
+          <a:xfrm>
+            <a:off x="9573539" y="4023359"/>
+            <a:ext cx="683742" cy="438912"/>
+          </a:xfrm>
+          <a:prstGeom prst="rect">
+            <a:avLst/>
+          </a:prstGeom>
+          <a:solidFill>
+            <a:srgbClr val="009CD6"/>
+          </a:solidFill>
+          <a:ln w="9525">
+            <a:solidFill>
+              <a:srgbClr val="FFFFFF"/>
+            </a:solidFill>
+          </a:ln>
+          <a:effectLst/>
+        </p:spPr>
+        <p:style>
+          <a:lnRef idx="1">
+            <a:schemeClr val="accent1"/>
+          </a:lnRef>
+          <a:fillRef idx="3">
+            <a:schemeClr val="accent1"/>
+          </a:fillRef>
+          <a:effectRef idx="2">
+            <a:schemeClr val="accent1"/>
+          </a:effectRef>
+          <a:fontRef idx="minor">
+            <a:schemeClr val="lt1"/>
+          </a:fontRef>
+        </p:style>
+        <p:txBody>
+          <a:bodyPr rtlCol="0" anchor="ctr"/>
+          <a:lstStyle/>
+          <a:p>
+            <a:pPr algn="ctr"/>
+          </a:p>
+        </p:txBody>
+      </p:sp>
+      <p:sp>
+        <p:nvSpPr>
+          <p:cNvPr id="22" name="TextBox 21"/>
+          <p:cNvSpPr txBox="1"/>
+          <p:nvPr/>
+        </p:nvSpPr>
+        <p:spPr>
+          <a:xfrm>
+            <a:off x="10376153" y="3968496"/>
+            <a:ext cx="1163574" cy="548640"/>
+          </a:xfrm>
+          <a:prstGeom prst="rect">
+            <a:avLst/>
+          </a:prstGeom>
+          <a:noFill/>
+        </p:spPr>
+        <p:txBody>
+          <a:bodyPr wrap="square" anchor="ctr">
+            <a:spAutoFit/>
+          </a:bodyPr>
+          <a:lstStyle/>
+          <a:p>
+            <a:r>
+              <a:rPr sz="1200" b="0" i="1">
+                <a:solidFill>
+                  <a:srgbClr val="595959"/>
+                </a:solidFill>
+                <a:latin typeface="Arial"/>
+              </a:rPr>
+              <a:t>paid ten times for identity</a:t>
+            </a:r>
+          </a:p>
+        </p:txBody>
+      </p:sp>
+      <p:sp>
+        <p:nvSpPr>
+          <p:cNvPr id="23" name="TextBox 22"/>
+          <p:cNvSpPr txBox="1"/>
+          <p:nvPr/>
+        </p:nvSpPr>
+        <p:spPr>
+          <a:xfrm>
+            <a:off x="658368" y="4791456"/>
+            <a:ext cx="2377440" cy="548640"/>
+          </a:xfrm>
+          <a:prstGeom prst="rect">
+            <a:avLst/>
+          </a:prstGeom>
+          <a:noFill/>
+        </p:spPr>
+        <p:txBody>
+          <a:bodyPr wrap="square" anchor="ctr">
+            <a:spAutoFit/>
+          </a:bodyPr>
+          <a:lstStyle/>
+          <a:p>
+            <a:r>
+              <a:rPr sz="1400" b="1" i="0">
+                <a:solidFill>
+                  <a:srgbClr val="1A1A1A"/>
+                </a:solidFill>
+                <a:latin typeface="Arial"/>
+              </a:rPr>
+              <a:t>Build once, consume ×9</a:t>
+            </a:r>
+          </a:p>
+        </p:txBody>
+      </p:sp>
+      <p:sp>
+        <p:nvSpPr>
+          <p:cNvPr id="24" name="Rectangle 23"/>
+          <p:cNvSpPr/>
+          <p:nvPr/>
+        </p:nvSpPr>
+        <p:spPr>
+          <a:xfrm>
+            <a:off x="3172968" y="4846320"/>
+            <a:ext cx="1813255" cy="438912"/>
+          </a:xfrm>
+          <a:prstGeom prst="rect">
+            <a:avLst/>
+          </a:prstGeom>
+          <a:solidFill>
+            <a:srgbClr val="009CD6"/>
+          </a:solidFill>
+          <a:ln w="9525">
+            <a:solidFill>
+              <a:srgbClr val="FFFFFF"/>
+            </a:solidFill>
+          </a:ln>
+          <a:effectLst/>
+        </p:spPr>
+        <p:style>
+          <a:lnRef idx="1">
+            <a:schemeClr val="accent1"/>
+          </a:lnRef>
+          <a:fillRef idx="3">
+            <a:schemeClr val="accent1"/>
+          </a:fillRef>
+          <a:effectRef idx="2">
+            <a:schemeClr val="accent1"/>
+          </a:effectRef>
+          <a:fontRef idx="minor">
+            <a:schemeClr val="lt1"/>
+          </a:fontRef>
+        </p:style>
+        <p:txBody>
+          <a:bodyPr rtlCol="0" anchor="ctr" lIns="54864" rIns="54864" tIns="0" bIns="0" wrap="square"/>
+          <a:lstStyle/>
+          <a:p>
+            <a:pPr algn="ctr"/>
+            <a:r>
+              <a:rPr sz="1100" b="1" i="0">
+                <a:solidFill>
+                  <a:srgbClr val="FFFFFF"/>
+                </a:solidFill>
+                <a:latin typeface="Arial"/>
+              </a:rPr>
+              <a:t>build once</a:t>
+            </a:r>
+          </a:p>
+        </p:txBody>
+      </p:sp>
+      <p:sp>
+        <p:nvSpPr>
+          <p:cNvPr id="25" name="Rectangle 24"/>
+          <p:cNvSpPr/>
+          <p:nvPr/>
+        </p:nvSpPr>
+        <p:spPr>
+          <a:xfrm>
+            <a:off x="5013655" y="4846320"/>
+            <a:ext cx="1311249" cy="438912"/>
+          </a:xfrm>
+          <a:prstGeom prst="rect">
+            <a:avLst/>
+          </a:prstGeom>
+          <a:solidFill>
+            <a:srgbClr val="E5F5FB"/>
+          </a:solidFill>
+          <a:ln w="9525">
+            <a:solidFill>
+              <a:srgbClr val="FFFFFF"/>
+            </a:solidFill>
+          </a:ln>
+          <a:effectLst/>
+        </p:spPr>
+        <p:style>
+          <a:lnRef idx="1">
+            <a:schemeClr val="accent1"/>
+          </a:lnRef>
+          <a:fillRef idx="3">
+            <a:schemeClr val="accent1"/>
+          </a:fillRef>
+          <a:effectRef idx="2">
+            <a:schemeClr val="accent1"/>
+          </a:effectRef>
+          <a:fontRef idx="minor">
+            <a:schemeClr val="lt1"/>
+          </a:fontRef>
+        </p:style>
+        <p:txBody>
+          <a:bodyPr rtlCol="0" anchor="ctr" lIns="54864" rIns="54864" tIns="0" bIns="0" wrap="square"/>
+          <a:lstStyle/>
+          <a:p>
+            <a:pPr algn="ctr"/>
+            <a:r>
+              <a:rPr sz="1100" b="1" i="0">
                 <a:solidFill>
                   <a:srgbClr val="006E96"/>
                 </a:solidFill>
                 <a:latin typeface="Arial"/>
               </a:rPr>
-              <a:t>ACROSS TEN PROJECTS</a:t>
-            </a:r>
-          </a:p>
-          <a:p>
-            <a:pPr>
-              <a:spcAft>
-                <a:spcPts val="700"/>
-              </a:spcAft>
-            </a:pPr>
-            <a:r>
-              <a:rPr sz="1600" b="0" i="0">
-                <a:solidFill>
-                  <a:srgbClr val="1A1A1A"/>
-                </a:solidFill>
-                <a:latin typeface="Arial"/>
-              </a:rPr>
-              <a:t>The country has paid ten times for identity.</a:t>
-            </a:r>
-          </a:p>
-          <a:p>
-            <a:pPr>
-              <a:spcAft>
-                <a:spcPts val="700"/>
-              </a:spcAft>
-            </a:pPr>
-            <a:r>
-              <a:rPr sz="1600" b="0" i="0">
-                <a:solidFill>
-                  <a:srgbClr val="1A1A1A"/>
-                </a:solidFill>
-                <a:latin typeface="Arial"/>
-              </a:rPr>
-              <a:t>The citizen proves who they are on paper at every counter.</a:t>
-            </a:r>
-          </a:p>
-        </p:txBody>
-      </p:sp>
-      <p:sp>
-        <p:nvSpPr>
-          <p:cNvPr id="8" name="TextBox 7"/>
+              <a:t>nine consume</a:t>
+            </a:r>
+          </a:p>
+        </p:txBody>
+      </p:sp>
+      <p:sp>
+        <p:nvSpPr>
+          <p:cNvPr id="26" name="TextBox 25"/>
           <p:cNvSpPr txBox="1"/>
           <p:nvPr/>
         </p:nvSpPr>
         <p:spPr>
           <a:xfrm>
-            <a:off x="658368" y="5715000"/>
+            <a:off x="6443776" y="4791456"/>
+            <a:ext cx="5095951" cy="548640"/>
+          </a:xfrm>
+          <a:prstGeom prst="rect">
+            <a:avLst/>
+          </a:prstGeom>
+          <a:noFill/>
+        </p:spPr>
+        <p:txBody>
+          <a:bodyPr wrap="square" anchor="ctr">
+            <a:spAutoFit/>
+          </a:bodyPr>
+          <a:lstStyle/>
+          <a:p>
+            <a:r>
+              <a:rPr sz="1200" b="0" i="1">
+                <a:solidFill>
+                  <a:srgbClr val="595959"/>
+                </a:solidFill>
+                <a:latin typeface="Arial"/>
+              </a:rPr>
+              <a:t>the citizen proves who they are once</a:t>
+            </a:r>
+          </a:p>
+        </p:txBody>
+      </p:sp>
+      <p:sp>
+        <p:nvSpPr>
+          <p:cNvPr id="27" name="TextBox 26"/>
+          <p:cNvSpPr txBox="1"/>
+          <p:nvPr/>
+        </p:nvSpPr>
+        <p:spPr>
+          <a:xfrm>
+            <a:off x="658368" y="5760720"/>
             <a:ext cx="10881360" cy="548640"/>
           </a:xfrm>
           <a:prstGeom prst="rect">
@@ -17919,7 +19251,7 @@
       </p:sp>
       <p:sp>
         <p:nvSpPr>
-          <p:cNvPr id="9" name="TextBox 8"/>
+          <p:cNvPr id="28" name="TextBox 27"/>
           <p:cNvSpPr txBox="1"/>
           <p:nvPr/>
         </p:nvSpPr>
@@ -18957,7 +20289,7 @@
         <p:spPr>
           <a:xfrm>
             <a:off x="658368" y="1600200"/>
-            <a:ext cx="10881360" cy="2651760"/>
+            <a:ext cx="10881360" cy="2295144"/>
           </a:xfrm>
           <a:prstGeom prst="rect">
             <a:avLst/>
@@ -19011,7 +20343,7 @@
         </p:nvSpPr>
         <p:spPr>
           <a:xfrm>
-            <a:off x="658368" y="4434840"/>
+            <a:off x="658368" y="4078224"/>
             <a:ext cx="10881360" cy="1325880"/>
           </a:xfrm>
           <a:prstGeom prst="roundRect">
@@ -19057,7 +20389,7 @@
         </p:nvSpPr>
         <p:spPr>
           <a:xfrm>
-            <a:off x="859536" y="4626864"/>
+            <a:off x="859536" y="4270248"/>
             <a:ext cx="10479024" cy="1051560"/>
           </a:xfrm>
           <a:prstGeom prst="rect">
@@ -19227,7 +20559,7 @@
         <p:spPr>
           <a:xfrm>
             <a:off x="658368" y="1600200"/>
-            <a:ext cx="10881360" cy="2651760"/>
+            <a:ext cx="10881360" cy="1984248"/>
           </a:xfrm>
           <a:prstGeom prst="rect">
             <a:avLst/>
@@ -19281,7 +20613,7 @@
         </p:nvSpPr>
         <p:spPr>
           <a:xfrm>
-            <a:off x="658368" y="4434840"/>
+            <a:off x="658368" y="3767328"/>
             <a:ext cx="10881360" cy="1325880"/>
           </a:xfrm>
           <a:prstGeom prst="roundRect">
@@ -19327,7 +20659,7 @@
         </p:nvSpPr>
         <p:spPr>
           <a:xfrm>
-            <a:off x="859536" y="4626864"/>
+            <a:off x="859536" y="3959352"/>
             <a:ext cx="10479024" cy="1051560"/>
           </a:xfrm>
           <a:prstGeom prst="rect">
@@ -20052,73 +21384,18 @@
       </p:sp>
       <p:sp>
         <p:nvSpPr>
-          <p:cNvPr id="4" name="TextBox 3"/>
-          <p:cNvSpPr txBox="1"/>
-          <p:nvPr/>
-        </p:nvSpPr>
-        <p:spPr>
-          <a:xfrm>
-            <a:off x="658368" y="1600200"/>
-            <a:ext cx="10881360" cy="2651760"/>
-          </a:xfrm>
-          <a:prstGeom prst="rect">
-            <a:avLst/>
-          </a:prstGeom>
-          <a:noFill/>
-        </p:spPr>
-        <p:txBody>
-          <a:bodyPr wrap="square">
-            <a:spAutoFit/>
-          </a:bodyPr>
-          <a:lstStyle/>
-          <a:p>
-            <a:pPr>
-              <a:spcAft>
-                <a:spcPts val="1200"/>
-              </a:spcAft>
-            </a:pPr>
-            <a:r>
-              <a:rPr sz="2000" b="0" i="0">
-                <a:solidFill>
-                  <a:srgbClr val="1A1A1A"/>
-                </a:solidFill>
-                <a:latin typeface="Arial"/>
-              </a:rPr>
-              <a:t>You paste the goal in the minister's own words — every learner should have one record that follows them through school. The AI returns the capabilities, the services and the data domains it implies.</a:t>
-            </a:r>
-          </a:p>
-          <a:p>
-            <a:pPr>
-              <a:spcAft>
-                <a:spcPts val="1200"/>
-              </a:spcAft>
-            </a:pPr>
-            <a:r>
-              <a:rPr sz="2000" b="0" i="0">
-                <a:solidFill>
-                  <a:srgbClr val="1A1A1A"/>
-                </a:solidFill>
-                <a:latin typeface="Arial"/>
-              </a:rPr>
-              <a:t>And the decisions it forces: who owns the authoritative learner, which bodies must consume it, what must be built and what must be reused.</a:t>
-            </a:r>
-          </a:p>
-        </p:txBody>
-      </p:sp>
-      <p:sp>
-        <p:nvSpPr>
-          <p:cNvPr id="5" name="Rounded Rectangle 4"/>
+          <p:cNvPr id="4" name="Rounded Rectangle 3"/>
           <p:cNvSpPr/>
           <p:nvPr/>
         </p:nvSpPr>
         <p:spPr>
           <a:xfrm>
-            <a:off x="658368" y="4434840"/>
-            <a:ext cx="10881360" cy="1325880"/>
+            <a:off x="658368" y="1645920"/>
+            <a:ext cx="3246120" cy="3840480"/>
           </a:xfrm>
           <a:prstGeom prst="roundRect">
             <a:avLst>
-              <a:gd name="adj" fmla="val 4500"/>
+              <a:gd name="adj" fmla="val 8000"/>
             </a:avLst>
           </a:prstGeom>
           <a:solidFill>
@@ -20144,23 +21421,354 @@
           </a:fontRef>
         </p:style>
         <p:txBody>
-          <a:bodyPr rtlCol="0" anchor="ctr"/>
-          <a:lstStyle/>
-          <a:p>
-            <a:pPr algn="ctr"/>
-          </a:p>
-        </p:txBody>
-      </p:sp>
-      <p:sp>
-        <p:nvSpPr>
-          <p:cNvPr id="6" name="TextBox 5"/>
+          <a:bodyPr rtlCol="0" anchor="t" lIns="128016" rIns="128016" tIns="91440" bIns="54864" wrap="square"/>
+          <a:lstStyle/>
+          <a:p>
+            <a:pPr algn="l">
+              <a:spcAft>
+                <a:spcPts val="300"/>
+              </a:spcAft>
+            </a:pPr>
+            <a:r>
+              <a:rPr sz="1200" b="1" i="0">
+                <a:solidFill>
+                  <a:srgbClr val="006E96"/>
+                </a:solidFill>
+                <a:latin typeface="Arial"/>
+              </a:rPr>
+              <a:t>YOU PASTE</a:t>
+            </a:r>
+          </a:p>
+          <a:p>
+            <a:pPr algn="l">
+              <a:spcAft>
+                <a:spcPts val="300"/>
+              </a:spcAft>
+            </a:pPr>
+            <a:r>
+              <a:rPr sz="1450" b="0" i="0">
+                <a:solidFill>
+                  <a:srgbClr val="1A1A1A"/>
+                </a:solidFill>
+                <a:latin typeface="Arial"/>
+              </a:rPr>
+              <a:t>The minister's goal, in their own words.</a:t>
+            </a:r>
+          </a:p>
+          <a:p>
+            <a:pPr algn="l">
+              <a:spcAft>
+                <a:spcPts val="300"/>
+              </a:spcAft>
+            </a:pPr>
+            <a:r>
+              <a:rPr sz="1450" b="0" i="0">
+                <a:solidFill>
+                  <a:srgbClr val="1A1A1A"/>
+                </a:solidFill>
+                <a:latin typeface="Arial"/>
+              </a:rPr>
+              <a:t>"Every learner should have one record that follows them through school."</a:t>
+            </a:r>
+          </a:p>
+        </p:txBody>
+      </p:sp>
+      <p:sp>
+        <p:nvSpPr>
+          <p:cNvPr id="5" name="Rounded Rectangle 4"/>
+          <p:cNvSpPr/>
+          <p:nvPr/>
+        </p:nvSpPr>
+        <p:spPr>
+          <a:xfrm>
+            <a:off x="4471416" y="1645920"/>
+            <a:ext cx="3246120" cy="3840480"/>
+          </a:xfrm>
+          <a:prstGeom prst="roundRect">
+            <a:avLst>
+              <a:gd name="adj" fmla="val 8000"/>
+            </a:avLst>
+          </a:prstGeom>
+          <a:solidFill>
+            <a:srgbClr val="F2F2F2"/>
+          </a:solidFill>
+          <a:ln>
+            <a:noFill/>
+          </a:ln>
+          <a:effectLst/>
+        </p:spPr>
+        <p:style>
+          <a:lnRef idx="1">
+            <a:schemeClr val="accent1"/>
+          </a:lnRef>
+          <a:fillRef idx="3">
+            <a:schemeClr val="accent1"/>
+          </a:fillRef>
+          <a:effectRef idx="2">
+            <a:schemeClr val="accent1"/>
+          </a:effectRef>
+          <a:fontRef idx="minor">
+            <a:schemeClr val="lt1"/>
+          </a:fontRef>
+        </p:style>
+        <p:txBody>
+          <a:bodyPr rtlCol="0" anchor="t" lIns="128016" rIns="128016" tIns="91440" bIns="54864" wrap="square"/>
+          <a:lstStyle/>
+          <a:p>
+            <a:pPr algn="l">
+              <a:spcAft>
+                <a:spcPts val="300"/>
+              </a:spcAft>
+            </a:pPr>
+            <a:r>
+              <a:rPr sz="1200" b="1" i="0">
+                <a:solidFill>
+                  <a:srgbClr val="006E96"/>
+                </a:solidFill>
+                <a:latin typeface="Arial"/>
+              </a:rPr>
+              <a:t>THE AI RETURNS</a:t>
+            </a:r>
+          </a:p>
+          <a:p>
+            <a:pPr algn="l">
+              <a:spcAft>
+                <a:spcPts val="300"/>
+              </a:spcAft>
+            </a:pPr>
+            <a:r>
+              <a:rPr sz="1450" b="0" i="0">
+                <a:solidFill>
+                  <a:srgbClr val="1A1A1A"/>
+                </a:solidFill>
+                <a:latin typeface="Arial"/>
+              </a:rPr>
+              <a:t>The capabilities it implies.</a:t>
+            </a:r>
+          </a:p>
+          <a:p>
+            <a:pPr algn="l">
+              <a:spcAft>
+                <a:spcPts val="300"/>
+              </a:spcAft>
+            </a:pPr>
+            <a:r>
+              <a:rPr sz="1450" b="0" i="0">
+                <a:solidFill>
+                  <a:srgbClr val="1A1A1A"/>
+                </a:solidFill>
+                <a:latin typeface="Arial"/>
+              </a:rPr>
+              <a:t>The services and the data domains.</a:t>
+            </a:r>
+          </a:p>
+          <a:p>
+            <a:pPr algn="l">
+              <a:spcAft>
+                <a:spcPts val="300"/>
+              </a:spcAft>
+            </a:pPr>
+            <a:r>
+              <a:rPr sz="1450" b="0" i="0">
+                <a:solidFill>
+                  <a:srgbClr val="1A1A1A"/>
+                </a:solidFill>
+                <a:latin typeface="Arial"/>
+              </a:rPr>
+              <a:t>Who owns the authoritative learner.</a:t>
+            </a:r>
+          </a:p>
+          <a:p>
+            <a:pPr algn="l">
+              <a:spcAft>
+                <a:spcPts val="300"/>
+              </a:spcAft>
+            </a:pPr>
+            <a:r>
+              <a:rPr sz="1450" b="0" i="0">
+                <a:solidFill>
+                  <a:srgbClr val="1A1A1A"/>
+                </a:solidFill>
+                <a:latin typeface="Arial"/>
+              </a:rPr>
+              <a:t>What to build and what to reuse.</a:t>
+            </a:r>
+          </a:p>
+        </p:txBody>
+      </p:sp>
+      <p:sp>
+        <p:nvSpPr>
+          <p:cNvPr id="6" name="Rounded Rectangle 5"/>
+          <p:cNvSpPr/>
+          <p:nvPr/>
+        </p:nvSpPr>
+        <p:spPr>
+          <a:xfrm>
+            <a:off x="8284464" y="1645920"/>
+            <a:ext cx="3246120" cy="3840480"/>
+          </a:xfrm>
+          <a:prstGeom prst="roundRect">
+            <a:avLst>
+              <a:gd name="adj" fmla="val 8000"/>
+            </a:avLst>
+          </a:prstGeom>
+          <a:solidFill>
+            <a:srgbClr val="006E96"/>
+          </a:solidFill>
+          <a:ln>
+            <a:noFill/>
+          </a:ln>
+          <a:effectLst/>
+        </p:spPr>
+        <p:style>
+          <a:lnRef idx="1">
+            <a:schemeClr val="accent1"/>
+          </a:lnRef>
+          <a:fillRef idx="3">
+            <a:schemeClr val="accent1"/>
+          </a:fillRef>
+          <a:effectRef idx="2">
+            <a:schemeClr val="accent1"/>
+          </a:effectRef>
+          <a:fontRef idx="minor">
+            <a:schemeClr val="lt1"/>
+          </a:fontRef>
+        </p:style>
+        <p:txBody>
+          <a:bodyPr rtlCol="0" anchor="t" lIns="128016" rIns="128016" tIns="91440" bIns="54864" wrap="square"/>
+          <a:lstStyle/>
+          <a:p>
+            <a:pPr algn="l">
+              <a:spcAft>
+                <a:spcPts val="300"/>
+              </a:spcAft>
+            </a:pPr>
+            <a:r>
+              <a:rPr sz="1200" b="1" i="0">
+                <a:solidFill>
+                  <a:srgbClr val="FFFFFF"/>
+                </a:solidFill>
+                <a:latin typeface="Arial"/>
+              </a:rPr>
+              <a:t>YOU DECIDE</a:t>
+            </a:r>
+          </a:p>
+          <a:p>
+            <a:pPr algn="l">
+              <a:spcAft>
+                <a:spcPts val="300"/>
+              </a:spcAft>
+            </a:pPr>
+            <a:r>
+              <a:rPr sz="1450" b="0" i="0">
+                <a:solidFill>
+                  <a:srgbClr val="FFFFFF"/>
+                </a:solidFill>
+                <a:latin typeface="Arial"/>
+              </a:rPr>
+              <a:t>Confirm it is what was meant.</a:t>
+            </a:r>
+          </a:p>
+          <a:p>
+            <a:pPr algn="l">
+              <a:spcAft>
+                <a:spcPts val="300"/>
+              </a:spcAft>
+            </a:pPr>
+            <a:r>
+              <a:rPr sz="1450" b="0" i="0">
+                <a:solidFill>
+                  <a:srgbClr val="FFFFFF"/>
+                </a:solidFill>
+                <a:latin typeface="Arial"/>
+              </a:rPr>
+              <a:t>Take the decisions to the Board.</a:t>
+            </a:r>
+          </a:p>
+        </p:txBody>
+      </p:sp>
+      <p:cxnSp>
+        <p:nvCxnSpPr>
+          <p:cNvPr id="7" name="Connector 6"/>
+          <p:cNvCxnSpPr/>
+          <p:nvPr/>
+        </p:nvCxnSpPr>
+        <p:spPr>
+          <a:xfrm>
+            <a:off x="3977639" y="3566160"/>
+            <a:ext cx="420625" cy="0"/>
+          </a:xfrm>
+          <a:prstGeom prst="line">
+            <a:avLst/>
+          </a:prstGeom>
+          <a:ln w="25400">
+            <a:solidFill>
+              <a:srgbClr val="006E96"/>
+            </a:solidFill>
+            <a:tailEnd type="triangle" w="med" len="med"/>
+          </a:ln>
+        </p:spPr>
+        <p:style>
+          <a:lnRef idx="2">
+            <a:schemeClr val="accent1"/>
+          </a:lnRef>
+          <a:fillRef idx="0">
+            <a:schemeClr val="accent1"/>
+          </a:fillRef>
+          <a:effectRef idx="1">
+            <a:schemeClr val="accent1"/>
+          </a:effectRef>
+          <a:fontRef idx="minor">
+            <a:schemeClr val="tx1"/>
+          </a:fontRef>
+        </p:style>
+      </p:cxnSp>
+      <p:cxnSp>
+        <p:nvCxnSpPr>
+          <p:cNvPr id="8" name="Connector 7"/>
+          <p:cNvCxnSpPr/>
+          <p:nvPr/>
+        </p:nvCxnSpPr>
+        <p:spPr>
+          <a:xfrm>
+            <a:off x="7790688" y="3566160"/>
+            <a:ext cx="420624" cy="0"/>
+          </a:xfrm>
+          <a:prstGeom prst="line">
+            <a:avLst/>
+          </a:prstGeom>
+          <a:ln w="25400">
+            <a:solidFill>
+              <a:srgbClr val="006E96"/>
+            </a:solidFill>
+            <a:tailEnd type="triangle" w="med" len="med"/>
+          </a:ln>
+        </p:spPr>
+        <p:style>
+          <a:lnRef idx="2">
+            <a:schemeClr val="accent1"/>
+          </a:lnRef>
+          <a:fillRef idx="0">
+            <a:schemeClr val="accent1"/>
+          </a:fillRef>
+          <a:effectRef idx="1">
+            <a:schemeClr val="accent1"/>
+          </a:effectRef>
+          <a:fontRef idx="minor">
+            <a:schemeClr val="tx1"/>
+          </a:fontRef>
+        </p:style>
+      </p:cxnSp>
+      <p:sp>
+        <p:nvSpPr>
+          <p:cNvPr id="9" name="TextBox 8"/>
           <p:cNvSpPr txBox="1"/>
           <p:nvPr/>
         </p:nvSpPr>
         <p:spPr>
           <a:xfrm>
-            <a:off x="859536" y="4626864"/>
-            <a:ext cx="10479024" cy="1051560"/>
+            <a:off x="658368" y="5760720"/>
+            <a:ext cx="10881360" cy="548640"/>
           </a:xfrm>
           <a:prstGeom prst="rect">
             <a:avLst/>
@@ -20173,13 +21781,8 @@
           </a:bodyPr>
           <a:lstStyle/>
           <a:p>
-            <a:pPr>
-              <a:spcAft>
-                <a:spcPts val="700"/>
-              </a:spcAft>
-            </a:pPr>
-            <a:r>
-              <a:rPr sz="2300" b="1" i="0">
+            <a:r>
+              <a:rPr sz="1550" b="1" i="0">
                 <a:solidFill>
                   <a:srgbClr val="006E96"/>
                 </a:solidFill>
@@ -20192,7 +21795,7 @@
       </p:sp>
       <p:sp>
         <p:nvSpPr>
-          <p:cNvPr id="7" name="TextBox 6"/>
+          <p:cNvPr id="10" name="TextBox 9"/>
           <p:cNvSpPr txBox="1"/>
           <p:nvPr/>
         </p:nvSpPr>
@@ -20322,73 +21925,18 @@
       </p:sp>
       <p:sp>
         <p:nvSpPr>
-          <p:cNvPr id="4" name="TextBox 3"/>
-          <p:cNvSpPr txBox="1"/>
-          <p:nvPr/>
-        </p:nvSpPr>
-        <p:spPr>
-          <a:xfrm>
-            <a:off x="658368" y="1600200"/>
-            <a:ext cx="10881360" cy="2651760"/>
-          </a:xfrm>
-          <a:prstGeom prst="rect">
-            <a:avLst/>
-          </a:prstGeom>
-          <a:noFill/>
-        </p:spPr>
-        <p:txBody>
-          <a:bodyPr wrap="square">
-            <a:spAutoFit/>
-          </a:bodyPr>
-          <a:lstStyle/>
-          <a:p>
-            <a:pPr>
-              <a:spcAft>
-                <a:spcPts val="1200"/>
-              </a:spcAft>
-            </a:pPr>
-            <a:r>
-              <a:rPr sz="2000" b="0" i="0">
-                <a:solidFill>
-                  <a:srgbClr val="1A1A1A"/>
-                </a:solidFill>
-                <a:latin typeface="Arial"/>
-              </a:rPr>
-              <a:t>You paste a technical decision — the Examination Authority will consume the Learner Registry over the data-exchange backbone. The AI returns what it means for the minister and the citizen.</a:t>
-            </a:r>
-          </a:p>
-          <a:p>
-            <a:pPr>
-              <a:spcAft>
-                <a:spcPts val="1200"/>
-              </a:spcAft>
-            </a:pPr>
-            <a:r>
-              <a:rPr sz="2000" b="0" i="0">
-                <a:solidFill>
-                  <a:srgbClr val="1A1A1A"/>
-                </a:solidFill>
-                <a:latin typeface="Arial"/>
-              </a:rPr>
-              <a:t>Parents stop re-entering their child's details. The single learner record becomes possible. The flagship can be delivered.</a:t>
-            </a:r>
-          </a:p>
-        </p:txBody>
-      </p:sp>
-      <p:sp>
-        <p:nvSpPr>
-          <p:cNvPr id="5" name="Rounded Rectangle 4"/>
+          <p:cNvPr id="4" name="Rounded Rectangle 3"/>
           <p:cNvSpPr/>
           <p:nvPr/>
         </p:nvSpPr>
         <p:spPr>
           <a:xfrm>
-            <a:off x="658368" y="4434840"/>
-            <a:ext cx="10881360" cy="1325880"/>
+            <a:off x="658368" y="1645920"/>
+            <a:ext cx="3246120" cy="3840480"/>
           </a:xfrm>
           <a:prstGeom prst="roundRect">
             <a:avLst>
-              <a:gd name="adj" fmla="val 4500"/>
+              <a:gd name="adj" fmla="val 8000"/>
             </a:avLst>
           </a:prstGeom>
           <a:solidFill>
@@ -20414,23 +21962,338 @@
           </a:fontRef>
         </p:style>
         <p:txBody>
-          <a:bodyPr rtlCol="0" anchor="ctr"/>
-          <a:lstStyle/>
-          <a:p>
-            <a:pPr algn="ctr"/>
-          </a:p>
-        </p:txBody>
-      </p:sp>
-      <p:sp>
-        <p:nvSpPr>
-          <p:cNvPr id="6" name="TextBox 5"/>
+          <a:bodyPr rtlCol="0" anchor="t" lIns="128016" rIns="128016" tIns="91440" bIns="54864" wrap="square"/>
+          <a:lstStyle/>
+          <a:p>
+            <a:pPr algn="l">
+              <a:spcAft>
+                <a:spcPts val="300"/>
+              </a:spcAft>
+            </a:pPr>
+            <a:r>
+              <a:rPr sz="1200" b="1" i="0">
+                <a:solidFill>
+                  <a:srgbClr val="006E96"/>
+                </a:solidFill>
+                <a:latin typeface="Arial"/>
+              </a:rPr>
+              <a:t>YOU PASTE</a:t>
+            </a:r>
+          </a:p>
+          <a:p>
+            <a:pPr algn="l">
+              <a:spcAft>
+                <a:spcPts val="300"/>
+              </a:spcAft>
+            </a:pPr>
+            <a:r>
+              <a:rPr sz="1450" b="0" i="0">
+                <a:solidFill>
+                  <a:srgbClr val="1A1A1A"/>
+                </a:solidFill>
+                <a:latin typeface="Arial"/>
+              </a:rPr>
+              <a:t>A technical decision.</a:t>
+            </a:r>
+          </a:p>
+          <a:p>
+            <a:pPr algn="l">
+              <a:spcAft>
+                <a:spcPts val="300"/>
+              </a:spcAft>
+            </a:pPr>
+            <a:r>
+              <a:rPr sz="1450" b="0" i="0">
+                <a:solidFill>
+                  <a:srgbClr val="1A1A1A"/>
+                </a:solidFill>
+                <a:latin typeface="Arial"/>
+              </a:rPr>
+              <a:t>"The Examination Authority will consume the Learner Registry."</a:t>
+            </a:r>
+          </a:p>
+        </p:txBody>
+      </p:sp>
+      <p:sp>
+        <p:nvSpPr>
+          <p:cNvPr id="5" name="Rounded Rectangle 4"/>
+          <p:cNvSpPr/>
+          <p:nvPr/>
+        </p:nvSpPr>
+        <p:spPr>
+          <a:xfrm>
+            <a:off x="4471416" y="1645920"/>
+            <a:ext cx="3246120" cy="3840480"/>
+          </a:xfrm>
+          <a:prstGeom prst="roundRect">
+            <a:avLst>
+              <a:gd name="adj" fmla="val 8000"/>
+            </a:avLst>
+          </a:prstGeom>
+          <a:solidFill>
+            <a:srgbClr val="F2F2F2"/>
+          </a:solidFill>
+          <a:ln>
+            <a:noFill/>
+          </a:ln>
+          <a:effectLst/>
+        </p:spPr>
+        <p:style>
+          <a:lnRef idx="1">
+            <a:schemeClr val="accent1"/>
+          </a:lnRef>
+          <a:fillRef idx="3">
+            <a:schemeClr val="accent1"/>
+          </a:fillRef>
+          <a:effectRef idx="2">
+            <a:schemeClr val="accent1"/>
+          </a:effectRef>
+          <a:fontRef idx="minor">
+            <a:schemeClr val="lt1"/>
+          </a:fontRef>
+        </p:style>
+        <p:txBody>
+          <a:bodyPr rtlCol="0" anchor="t" lIns="128016" rIns="128016" tIns="91440" bIns="54864" wrap="square"/>
+          <a:lstStyle/>
+          <a:p>
+            <a:pPr algn="l">
+              <a:spcAft>
+                <a:spcPts val="300"/>
+              </a:spcAft>
+            </a:pPr>
+            <a:r>
+              <a:rPr sz="1200" b="1" i="0">
+                <a:solidFill>
+                  <a:srgbClr val="006E96"/>
+                </a:solidFill>
+                <a:latin typeface="Arial"/>
+              </a:rPr>
+              <a:t>THE AI RETURNS</a:t>
+            </a:r>
+          </a:p>
+          <a:p>
+            <a:pPr algn="l">
+              <a:spcAft>
+                <a:spcPts val="300"/>
+              </a:spcAft>
+            </a:pPr>
+            <a:r>
+              <a:rPr sz="1450" b="0" i="0">
+                <a:solidFill>
+                  <a:srgbClr val="1A1A1A"/>
+                </a:solidFill>
+                <a:latin typeface="Arial"/>
+              </a:rPr>
+              <a:t>Parents stop re-entering details.</a:t>
+            </a:r>
+          </a:p>
+          <a:p>
+            <a:pPr algn="l">
+              <a:spcAft>
+                <a:spcPts val="300"/>
+              </a:spcAft>
+            </a:pPr>
+            <a:r>
+              <a:rPr sz="1450" b="0" i="0">
+                <a:solidFill>
+                  <a:srgbClr val="1A1A1A"/>
+                </a:solidFill>
+                <a:latin typeface="Arial"/>
+              </a:rPr>
+              <a:t>The single learner record becomes possible.</a:t>
+            </a:r>
+          </a:p>
+          <a:p>
+            <a:pPr algn="l">
+              <a:spcAft>
+                <a:spcPts val="300"/>
+              </a:spcAft>
+            </a:pPr>
+            <a:r>
+              <a:rPr sz="1450" b="0" i="0">
+                <a:solidFill>
+                  <a:srgbClr val="1A1A1A"/>
+                </a:solidFill>
+                <a:latin typeface="Arial"/>
+              </a:rPr>
+              <a:t>The flagship can be delivered.</a:t>
+            </a:r>
+          </a:p>
+        </p:txBody>
+      </p:sp>
+      <p:sp>
+        <p:nvSpPr>
+          <p:cNvPr id="6" name="Rounded Rectangle 5"/>
+          <p:cNvSpPr/>
+          <p:nvPr/>
+        </p:nvSpPr>
+        <p:spPr>
+          <a:xfrm>
+            <a:off x="8284464" y="1645920"/>
+            <a:ext cx="3246120" cy="3840480"/>
+          </a:xfrm>
+          <a:prstGeom prst="roundRect">
+            <a:avLst>
+              <a:gd name="adj" fmla="val 8000"/>
+            </a:avLst>
+          </a:prstGeom>
+          <a:solidFill>
+            <a:srgbClr val="006E96"/>
+          </a:solidFill>
+          <a:ln>
+            <a:noFill/>
+          </a:ln>
+          <a:effectLst/>
+        </p:spPr>
+        <p:style>
+          <a:lnRef idx="1">
+            <a:schemeClr val="accent1"/>
+          </a:lnRef>
+          <a:fillRef idx="3">
+            <a:schemeClr val="accent1"/>
+          </a:fillRef>
+          <a:effectRef idx="2">
+            <a:schemeClr val="accent1"/>
+          </a:effectRef>
+          <a:fontRef idx="minor">
+            <a:schemeClr val="lt1"/>
+          </a:fontRef>
+        </p:style>
+        <p:txBody>
+          <a:bodyPr rtlCol="0" anchor="t" lIns="128016" rIns="128016" tIns="91440" bIns="54864" wrap="square"/>
+          <a:lstStyle/>
+          <a:p>
+            <a:pPr algn="l">
+              <a:spcAft>
+                <a:spcPts val="300"/>
+              </a:spcAft>
+            </a:pPr>
+            <a:r>
+              <a:rPr sz="1200" b="1" i="0">
+                <a:solidFill>
+                  <a:srgbClr val="FFFFFF"/>
+                </a:solidFill>
+                <a:latin typeface="Arial"/>
+              </a:rPr>
+              <a:t>YOU DECIDE</a:t>
+            </a:r>
+          </a:p>
+          <a:p>
+            <a:pPr algn="l">
+              <a:spcAft>
+                <a:spcPts val="300"/>
+              </a:spcAft>
+            </a:pPr>
+            <a:r>
+              <a:rPr sz="1450" b="0" i="0">
+                <a:solidFill>
+                  <a:srgbClr val="FFFFFF"/>
+                </a:solidFill>
+                <a:latin typeface="Arial"/>
+              </a:rPr>
+              <a:t>Brief the minister in their language.</a:t>
+            </a:r>
+          </a:p>
+          <a:p>
+            <a:pPr algn="l">
+              <a:spcAft>
+                <a:spcPts val="300"/>
+              </a:spcAft>
+            </a:pPr>
+            <a:r>
+              <a:rPr sz="1450" b="0" i="0">
+                <a:solidFill>
+                  <a:srgbClr val="FFFFFF"/>
+                </a:solidFill>
+                <a:latin typeface="Arial"/>
+              </a:rPr>
+              <a:t>Own the trade-offs it carries.</a:t>
+            </a:r>
+          </a:p>
+        </p:txBody>
+      </p:sp>
+      <p:cxnSp>
+        <p:nvCxnSpPr>
+          <p:cNvPr id="7" name="Connector 6"/>
+          <p:cNvCxnSpPr/>
+          <p:nvPr/>
+        </p:nvCxnSpPr>
+        <p:spPr>
+          <a:xfrm>
+            <a:off x="3977639" y="3566160"/>
+            <a:ext cx="420625" cy="0"/>
+          </a:xfrm>
+          <a:prstGeom prst="line">
+            <a:avLst/>
+          </a:prstGeom>
+          <a:ln w="25400">
+            <a:solidFill>
+              <a:srgbClr val="006E96"/>
+            </a:solidFill>
+            <a:tailEnd type="triangle" w="med" len="med"/>
+          </a:ln>
+        </p:spPr>
+        <p:style>
+          <a:lnRef idx="2">
+            <a:schemeClr val="accent1"/>
+          </a:lnRef>
+          <a:fillRef idx="0">
+            <a:schemeClr val="accent1"/>
+          </a:fillRef>
+          <a:effectRef idx="1">
+            <a:schemeClr val="accent1"/>
+          </a:effectRef>
+          <a:fontRef idx="minor">
+            <a:schemeClr val="tx1"/>
+          </a:fontRef>
+        </p:style>
+      </p:cxnSp>
+      <p:cxnSp>
+        <p:nvCxnSpPr>
+          <p:cNvPr id="8" name="Connector 7"/>
+          <p:cNvCxnSpPr/>
+          <p:nvPr/>
+        </p:nvCxnSpPr>
+        <p:spPr>
+          <a:xfrm>
+            <a:off x="7790688" y="3566160"/>
+            <a:ext cx="420624" cy="0"/>
+          </a:xfrm>
+          <a:prstGeom prst="line">
+            <a:avLst/>
+          </a:prstGeom>
+          <a:ln w="25400">
+            <a:solidFill>
+              <a:srgbClr val="006E96"/>
+            </a:solidFill>
+            <a:tailEnd type="triangle" w="med" len="med"/>
+          </a:ln>
+        </p:spPr>
+        <p:style>
+          <a:lnRef idx="2">
+            <a:schemeClr val="accent1"/>
+          </a:lnRef>
+          <a:fillRef idx="0">
+            <a:schemeClr val="accent1"/>
+          </a:fillRef>
+          <a:effectRef idx="1">
+            <a:schemeClr val="accent1"/>
+          </a:effectRef>
+          <a:fontRef idx="minor">
+            <a:schemeClr val="tx1"/>
+          </a:fontRef>
+        </p:style>
+      </p:cxnSp>
+      <p:sp>
+        <p:nvSpPr>
+          <p:cNvPr id="9" name="TextBox 8"/>
           <p:cNvSpPr txBox="1"/>
           <p:nvPr/>
         </p:nvSpPr>
         <p:spPr>
           <a:xfrm>
-            <a:off x="859536" y="4626864"/>
-            <a:ext cx="10479024" cy="1051560"/>
+            <a:off x="658368" y="5760720"/>
+            <a:ext cx="10881360" cy="548640"/>
           </a:xfrm>
           <a:prstGeom prst="rect">
             <a:avLst/>
@@ -20443,13 +22306,8 @@
           </a:bodyPr>
           <a:lstStyle/>
           <a:p>
-            <a:pPr>
-              <a:spcAft>
-                <a:spcPts val="700"/>
-              </a:spcAft>
-            </a:pPr>
-            <a:r>
-              <a:rPr sz="2300" b="1" i="0">
+            <a:r>
+              <a:rPr sz="1550" b="1" i="0">
                 <a:solidFill>
                   <a:srgbClr val="006E96"/>
                 </a:solidFill>
@@ -20462,7 +22320,7 @@
       </p:sp>
       <p:sp>
         <p:nvSpPr>
-          <p:cNvPr id="7" name="TextBox 6"/>
+          <p:cNvPr id="10" name="TextBox 9"/>
           <p:cNvSpPr txBox="1"/>
           <p:nvPr/>
         </p:nvSpPr>
@@ -21175,7 +23033,7 @@
         <p:spPr>
           <a:xfrm>
             <a:off x="658368" y="1600200"/>
-            <a:ext cx="10881360" cy="2651760"/>
+            <a:ext cx="10881360" cy="1673352"/>
           </a:xfrm>
           <a:prstGeom prst="rect">
             <a:avLst/>
@@ -21229,7 +23087,7 @@
         </p:nvSpPr>
         <p:spPr>
           <a:xfrm>
-            <a:off x="658368" y="4434840"/>
+            <a:off x="658368" y="3456432"/>
             <a:ext cx="10881360" cy="1325880"/>
           </a:xfrm>
           <a:prstGeom prst="roundRect">
@@ -21275,7 +23133,7 @@
         </p:nvSpPr>
         <p:spPr>
           <a:xfrm>
-            <a:off x="859536" y="4626864"/>
+            <a:off x="859536" y="3648456"/>
             <a:ext cx="10479024" cy="1051560"/>
           </a:xfrm>
           <a:prstGeom prst="rect">
@@ -23319,73 +25177,18 @@
       </p:sp>
       <p:sp>
         <p:nvSpPr>
-          <p:cNvPr id="4" name="TextBox 3"/>
-          <p:cNvSpPr txBox="1"/>
-          <p:nvPr/>
-        </p:nvSpPr>
-        <p:spPr>
-          <a:xfrm>
-            <a:off x="658368" y="1600200"/>
-            <a:ext cx="10881360" cy="2651760"/>
-          </a:xfrm>
-          <a:prstGeom prst="rect">
-            <a:avLst/>
-          </a:prstGeom>
-          <a:noFill/>
-        </p:spPr>
-        <p:txBody>
-          <a:bodyPr wrap="square">
-            <a:spAutoFit/>
-          </a:bodyPr>
-          <a:lstStyle/>
-          <a:p>
-            <a:pPr>
-              <a:spcAft>
-                <a:spcPts val="1200"/>
-              </a:spcAft>
-            </a:pPr>
-            <a:r>
-              <a:rPr sz="2000" b="0" i="0">
-                <a:solidFill>
-                  <a:srgbClr val="1A1A1A"/>
-                </a:solidFill>
-                <a:latin typeface="Arial"/>
-              </a:rPr>
-              <a:t>You paste a real project proposal — the scholarship programme that wants its own learner list — and the AI drafts the gate questions answered, a recommended ruling and the decision-log entry.</a:t>
-            </a:r>
-          </a:p>
-          <a:p>
-            <a:pPr>
-              <a:spcAft>
-                <a:spcPts val="1200"/>
-              </a:spcAft>
-            </a:pPr>
-            <a:r>
-              <a:rPr sz="2000" b="0" i="0">
-                <a:solidFill>
-                  <a:srgbClr val="1A1A1A"/>
-                </a:solidFill>
-                <a:latin typeface="Arial"/>
-              </a:rPr>
-              <a:t>The ruling it recommends is either consume the registry, or a written exception with a sunset date and a reason.</a:t>
-            </a:r>
-          </a:p>
-        </p:txBody>
-      </p:sp>
-      <p:sp>
-        <p:nvSpPr>
-          <p:cNvPr id="5" name="Rounded Rectangle 4"/>
+          <p:cNvPr id="4" name="Rounded Rectangle 3"/>
           <p:cNvSpPr/>
           <p:nvPr/>
         </p:nvSpPr>
         <p:spPr>
           <a:xfrm>
-            <a:off x="658368" y="4434840"/>
-            <a:ext cx="10881360" cy="1325880"/>
+            <a:off x="658368" y="1645920"/>
+            <a:ext cx="3246120" cy="3840480"/>
           </a:xfrm>
           <a:prstGeom prst="roundRect">
             <a:avLst>
-              <a:gd name="adj" fmla="val 4500"/>
+              <a:gd name="adj" fmla="val 8000"/>
             </a:avLst>
           </a:prstGeom>
           <a:solidFill>
@@ -23411,23 +25214,338 @@
           </a:fontRef>
         </p:style>
         <p:txBody>
-          <a:bodyPr rtlCol="0" anchor="ctr"/>
-          <a:lstStyle/>
-          <a:p>
-            <a:pPr algn="ctr"/>
-          </a:p>
-        </p:txBody>
-      </p:sp>
-      <p:sp>
-        <p:nvSpPr>
-          <p:cNvPr id="6" name="TextBox 5"/>
+          <a:bodyPr rtlCol="0" anchor="t" lIns="128016" rIns="128016" tIns="91440" bIns="54864" wrap="square"/>
+          <a:lstStyle/>
+          <a:p>
+            <a:pPr algn="l">
+              <a:spcAft>
+                <a:spcPts val="300"/>
+              </a:spcAft>
+            </a:pPr>
+            <a:r>
+              <a:rPr sz="1200" b="1" i="0">
+                <a:solidFill>
+                  <a:srgbClr val="006E96"/>
+                </a:solidFill>
+                <a:latin typeface="Arial"/>
+              </a:rPr>
+              <a:t>YOU PASTE</a:t>
+            </a:r>
+          </a:p>
+          <a:p>
+            <a:pPr algn="l">
+              <a:spcAft>
+                <a:spcPts val="300"/>
+              </a:spcAft>
+            </a:pPr>
+            <a:r>
+              <a:rPr sz="1450" b="0" i="0">
+                <a:solidFill>
+                  <a:srgbClr val="1A1A1A"/>
+                </a:solidFill>
+                <a:latin typeface="Arial"/>
+              </a:rPr>
+              <a:t>A real project proposal.</a:t>
+            </a:r>
+          </a:p>
+          <a:p>
+            <a:pPr algn="l">
+              <a:spcAft>
+                <a:spcPts val="300"/>
+              </a:spcAft>
+            </a:pPr>
+            <a:r>
+              <a:rPr sz="1450" b="0" i="0">
+                <a:solidFill>
+                  <a:srgbClr val="1A1A1A"/>
+                </a:solidFill>
+                <a:latin typeface="Arial"/>
+              </a:rPr>
+              <a:t>The scholarship programme that wants its own learner list.</a:t>
+            </a:r>
+          </a:p>
+        </p:txBody>
+      </p:sp>
+      <p:sp>
+        <p:nvSpPr>
+          <p:cNvPr id="5" name="Rounded Rectangle 4"/>
+          <p:cNvSpPr/>
+          <p:nvPr/>
+        </p:nvSpPr>
+        <p:spPr>
+          <a:xfrm>
+            <a:off x="4471416" y="1645920"/>
+            <a:ext cx="3246120" cy="3840480"/>
+          </a:xfrm>
+          <a:prstGeom prst="roundRect">
+            <a:avLst>
+              <a:gd name="adj" fmla="val 8000"/>
+            </a:avLst>
+          </a:prstGeom>
+          <a:solidFill>
+            <a:srgbClr val="F2F2F2"/>
+          </a:solidFill>
+          <a:ln>
+            <a:noFill/>
+          </a:ln>
+          <a:effectLst/>
+        </p:spPr>
+        <p:style>
+          <a:lnRef idx="1">
+            <a:schemeClr val="accent1"/>
+          </a:lnRef>
+          <a:fillRef idx="3">
+            <a:schemeClr val="accent1"/>
+          </a:fillRef>
+          <a:effectRef idx="2">
+            <a:schemeClr val="accent1"/>
+          </a:effectRef>
+          <a:fontRef idx="minor">
+            <a:schemeClr val="lt1"/>
+          </a:fontRef>
+        </p:style>
+        <p:txBody>
+          <a:bodyPr rtlCol="0" anchor="t" lIns="128016" rIns="128016" tIns="91440" bIns="54864" wrap="square"/>
+          <a:lstStyle/>
+          <a:p>
+            <a:pPr algn="l">
+              <a:spcAft>
+                <a:spcPts val="300"/>
+              </a:spcAft>
+            </a:pPr>
+            <a:r>
+              <a:rPr sz="1200" b="1" i="0">
+                <a:solidFill>
+                  <a:srgbClr val="006E96"/>
+                </a:solidFill>
+                <a:latin typeface="Arial"/>
+              </a:rPr>
+              <a:t>THE AI RETURNS</a:t>
+            </a:r>
+          </a:p>
+          <a:p>
+            <a:pPr algn="l">
+              <a:spcAft>
+                <a:spcPts val="300"/>
+              </a:spcAft>
+            </a:pPr>
+            <a:r>
+              <a:rPr sz="1450" b="0" i="0">
+                <a:solidFill>
+                  <a:srgbClr val="1A1A1A"/>
+                </a:solidFill>
+                <a:latin typeface="Arial"/>
+              </a:rPr>
+              <a:t>The gate questions, answered.</a:t>
+            </a:r>
+          </a:p>
+          <a:p>
+            <a:pPr algn="l">
+              <a:spcAft>
+                <a:spcPts val="300"/>
+              </a:spcAft>
+            </a:pPr>
+            <a:r>
+              <a:rPr sz="1450" b="0" i="0">
+                <a:solidFill>
+                  <a:srgbClr val="1A1A1A"/>
+                </a:solidFill>
+                <a:latin typeface="Arial"/>
+              </a:rPr>
+              <a:t>A recommended ruling.</a:t>
+            </a:r>
+          </a:p>
+          <a:p>
+            <a:pPr algn="l">
+              <a:spcAft>
+                <a:spcPts val="300"/>
+              </a:spcAft>
+            </a:pPr>
+            <a:r>
+              <a:rPr sz="1450" b="0" i="0">
+                <a:solidFill>
+                  <a:srgbClr val="1A1A1A"/>
+                </a:solidFill>
+                <a:latin typeface="Arial"/>
+              </a:rPr>
+              <a:t>The decision-log entry.</a:t>
+            </a:r>
+          </a:p>
+        </p:txBody>
+      </p:sp>
+      <p:sp>
+        <p:nvSpPr>
+          <p:cNvPr id="6" name="Rounded Rectangle 5"/>
+          <p:cNvSpPr/>
+          <p:nvPr/>
+        </p:nvSpPr>
+        <p:spPr>
+          <a:xfrm>
+            <a:off x="8284464" y="1645920"/>
+            <a:ext cx="3246120" cy="3840480"/>
+          </a:xfrm>
+          <a:prstGeom prst="roundRect">
+            <a:avLst>
+              <a:gd name="adj" fmla="val 8000"/>
+            </a:avLst>
+          </a:prstGeom>
+          <a:solidFill>
+            <a:srgbClr val="006E96"/>
+          </a:solidFill>
+          <a:ln>
+            <a:noFill/>
+          </a:ln>
+          <a:effectLst/>
+        </p:spPr>
+        <p:style>
+          <a:lnRef idx="1">
+            <a:schemeClr val="accent1"/>
+          </a:lnRef>
+          <a:fillRef idx="3">
+            <a:schemeClr val="accent1"/>
+          </a:fillRef>
+          <a:effectRef idx="2">
+            <a:schemeClr val="accent1"/>
+          </a:effectRef>
+          <a:fontRef idx="minor">
+            <a:schemeClr val="lt1"/>
+          </a:fontRef>
+        </p:style>
+        <p:txBody>
+          <a:bodyPr rtlCol="0" anchor="t" lIns="128016" rIns="128016" tIns="91440" bIns="54864" wrap="square"/>
+          <a:lstStyle/>
+          <a:p>
+            <a:pPr algn="l">
+              <a:spcAft>
+                <a:spcPts val="300"/>
+              </a:spcAft>
+            </a:pPr>
+            <a:r>
+              <a:rPr sz="1200" b="1" i="0">
+                <a:solidFill>
+                  <a:srgbClr val="FFFFFF"/>
+                </a:solidFill>
+                <a:latin typeface="Arial"/>
+              </a:rPr>
+              <a:t>YOU DECIDE</a:t>
+            </a:r>
+          </a:p>
+          <a:p>
+            <a:pPr algn="l">
+              <a:spcAft>
+                <a:spcPts val="300"/>
+              </a:spcAft>
+            </a:pPr>
+            <a:r>
+              <a:rPr sz="1450" b="0" i="0">
+                <a:solidFill>
+                  <a:srgbClr val="FFFFFF"/>
+                </a:solidFill>
+                <a:latin typeface="Arial"/>
+              </a:rPr>
+              <a:t>The Board rules.</a:t>
+            </a:r>
+          </a:p>
+          <a:p>
+            <a:pPr algn="l">
+              <a:spcAft>
+                <a:spcPts val="300"/>
+              </a:spcAft>
+            </a:pPr>
+            <a:r>
+              <a:rPr sz="1450" b="0" i="0">
+                <a:solidFill>
+                  <a:srgbClr val="FFFFFF"/>
+                </a:solidFill>
+                <a:latin typeface="Arial"/>
+              </a:rPr>
+              <a:t>Consume the registry, or a time-boxed written exception.</a:t>
+            </a:r>
+          </a:p>
+        </p:txBody>
+      </p:sp>
+      <p:cxnSp>
+        <p:nvCxnSpPr>
+          <p:cNvPr id="7" name="Connector 6"/>
+          <p:cNvCxnSpPr/>
+          <p:nvPr/>
+        </p:nvCxnSpPr>
+        <p:spPr>
+          <a:xfrm>
+            <a:off x="3977639" y="3566160"/>
+            <a:ext cx="420625" cy="0"/>
+          </a:xfrm>
+          <a:prstGeom prst="line">
+            <a:avLst/>
+          </a:prstGeom>
+          <a:ln w="25400">
+            <a:solidFill>
+              <a:srgbClr val="006E96"/>
+            </a:solidFill>
+            <a:tailEnd type="triangle" w="med" len="med"/>
+          </a:ln>
+        </p:spPr>
+        <p:style>
+          <a:lnRef idx="2">
+            <a:schemeClr val="accent1"/>
+          </a:lnRef>
+          <a:fillRef idx="0">
+            <a:schemeClr val="accent1"/>
+          </a:fillRef>
+          <a:effectRef idx="1">
+            <a:schemeClr val="accent1"/>
+          </a:effectRef>
+          <a:fontRef idx="minor">
+            <a:schemeClr val="tx1"/>
+          </a:fontRef>
+        </p:style>
+      </p:cxnSp>
+      <p:cxnSp>
+        <p:nvCxnSpPr>
+          <p:cNvPr id="8" name="Connector 7"/>
+          <p:cNvCxnSpPr/>
+          <p:nvPr/>
+        </p:nvCxnSpPr>
+        <p:spPr>
+          <a:xfrm>
+            <a:off x="7790688" y="3566160"/>
+            <a:ext cx="420624" cy="0"/>
+          </a:xfrm>
+          <a:prstGeom prst="line">
+            <a:avLst/>
+          </a:prstGeom>
+          <a:ln w="25400">
+            <a:solidFill>
+              <a:srgbClr val="006E96"/>
+            </a:solidFill>
+            <a:tailEnd type="triangle" w="med" len="med"/>
+          </a:ln>
+        </p:spPr>
+        <p:style>
+          <a:lnRef idx="2">
+            <a:schemeClr val="accent1"/>
+          </a:lnRef>
+          <a:fillRef idx="0">
+            <a:schemeClr val="accent1"/>
+          </a:fillRef>
+          <a:effectRef idx="1">
+            <a:schemeClr val="accent1"/>
+          </a:effectRef>
+          <a:fontRef idx="minor">
+            <a:schemeClr val="tx1"/>
+          </a:fontRef>
+        </p:style>
+      </p:cxnSp>
+      <p:sp>
+        <p:nvSpPr>
+          <p:cNvPr id="9" name="TextBox 8"/>
           <p:cNvSpPr txBox="1"/>
           <p:nvPr/>
         </p:nvSpPr>
         <p:spPr>
           <a:xfrm>
-            <a:off x="859536" y="4626864"/>
-            <a:ext cx="10479024" cy="1051560"/>
+            <a:off x="658368" y="5760720"/>
+            <a:ext cx="10881360" cy="548640"/>
           </a:xfrm>
           <a:prstGeom prst="rect">
             <a:avLst/>
@@ -23440,13 +25558,8 @@
           </a:bodyPr>
           <a:lstStyle/>
           <a:p>
-            <a:pPr>
-              <a:spcAft>
-                <a:spcPts val="700"/>
-              </a:spcAft>
-            </a:pPr>
-            <a:r>
-              <a:rPr sz="2300" b="1" i="0">
+            <a:r>
+              <a:rPr sz="1550" b="1" i="0">
                 <a:solidFill>
                   <a:srgbClr val="006E96"/>
                 </a:solidFill>
@@ -23459,7 +25572,7 @@
       </p:sp>
       <p:sp>
         <p:nvSpPr>
-          <p:cNvPr id="7" name="TextBox 6"/>
+          <p:cNvPr id="10" name="TextBox 9"/>
           <p:cNvSpPr txBox="1"/>
           <p:nvPr/>
         </p:nvSpPr>
@@ -23596,7 +25709,7 @@
         <p:spPr>
           <a:xfrm>
             <a:off x="658368" y="1600200"/>
-            <a:ext cx="10881360" cy="2651760"/>
+            <a:ext cx="10881360" cy="1984248"/>
           </a:xfrm>
           <a:prstGeom prst="rect">
             <a:avLst/>
@@ -23650,7 +25763,7 @@
         </p:nvSpPr>
         <p:spPr>
           <a:xfrm>
-            <a:off x="658368" y="4434840"/>
+            <a:off x="658368" y="3767328"/>
             <a:ext cx="10881360" cy="1325880"/>
           </a:xfrm>
           <a:prstGeom prst="roundRect">
@@ -23696,7 +25809,7 @@
         </p:nvSpPr>
         <p:spPr>
           <a:xfrm>
-            <a:off x="859536" y="4626864"/>
+            <a:off x="859536" y="3959352"/>
             <a:ext cx="10479024" cy="1051560"/>
           </a:xfrm>
           <a:prstGeom prst="rect">
@@ -24944,7 +27057,7 @@
         <p:spPr>
           <a:xfrm>
             <a:off x="658368" y="1600200"/>
-            <a:ext cx="10881360" cy="2651760"/>
+            <a:ext cx="10881360" cy="1673352"/>
           </a:xfrm>
           <a:prstGeom prst="rect">
             <a:avLst/>
@@ -24998,7 +27111,7 @@
         </p:nvSpPr>
         <p:spPr>
           <a:xfrm>
-            <a:off x="658368" y="4434840"/>
+            <a:off x="658368" y="3456432"/>
             <a:ext cx="10881360" cy="1325880"/>
           </a:xfrm>
           <a:prstGeom prst="roundRect">
@@ -25044,7 +27157,7 @@
         </p:nvSpPr>
         <p:spPr>
           <a:xfrm>
-            <a:off x="859536" y="4626864"/>
+            <a:off x="859536" y="3648456"/>
             <a:ext cx="10479024" cy="1051560"/>
           </a:xfrm>
           <a:prstGeom prst="rect">
@@ -25214,7 +27327,7 @@
         <p:spPr>
           <a:xfrm>
             <a:off x="658368" y="1600200"/>
-            <a:ext cx="10881360" cy="2651760"/>
+            <a:ext cx="10881360" cy="1673352"/>
           </a:xfrm>
           <a:prstGeom prst="rect">
             <a:avLst/>
@@ -25268,7 +27381,7 @@
         </p:nvSpPr>
         <p:spPr>
           <a:xfrm>
-            <a:off x="658368" y="4434840"/>
+            <a:off x="658368" y="3456432"/>
             <a:ext cx="10881360" cy="1325880"/>
           </a:xfrm>
           <a:prstGeom prst="roundRect">
@@ -25314,7 +27427,7 @@
         </p:nvSpPr>
         <p:spPr>
           <a:xfrm>
-            <a:off x="859536" y="4626864"/>
+            <a:off x="859536" y="3648456"/>
             <a:ext cx="10479024" cy="1051560"/>
           </a:xfrm>
           <a:prstGeom prst="rect">
@@ -26212,7 +28325,7 @@
         <p:spPr>
           <a:xfrm>
             <a:off x="658368" y="1600200"/>
-            <a:ext cx="10881360" cy="2651760"/>
+            <a:ext cx="10881360" cy="1673352"/>
           </a:xfrm>
           <a:prstGeom prst="rect">
             <a:avLst/>
@@ -26266,7 +28379,7 @@
         </p:nvSpPr>
         <p:spPr>
           <a:xfrm>
-            <a:off x="658368" y="4434840"/>
+            <a:off x="658368" y="3456432"/>
             <a:ext cx="10881360" cy="1325880"/>
           </a:xfrm>
           <a:prstGeom prst="roundRect">
@@ -26312,7 +28425,7 @@
         </p:nvSpPr>
         <p:spPr>
           <a:xfrm>
-            <a:off x="859536" y="4626864"/>
+            <a:off x="859536" y="3648456"/>
             <a:ext cx="10479024" cy="1051560"/>
           </a:xfrm>
           <a:prstGeom prst="rect">
@@ -27044,7 +29157,7 @@
         <p:spPr>
           <a:xfrm>
             <a:off x="658368" y="1600200"/>
-            <a:ext cx="10881360" cy="2651760"/>
+            <a:ext cx="10881360" cy="1984248"/>
           </a:xfrm>
           <a:prstGeom prst="rect">
             <a:avLst/>
@@ -27098,7 +29211,7 @@
         </p:nvSpPr>
         <p:spPr>
           <a:xfrm>
-            <a:off x="658368" y="4434840"/>
+            <a:off x="658368" y="3767328"/>
             <a:ext cx="10881360" cy="1325880"/>
           </a:xfrm>
           <a:prstGeom prst="roundRect">
@@ -27144,7 +29257,7 @@
         </p:nvSpPr>
         <p:spPr>
           <a:xfrm>
-            <a:off x="859536" y="4626864"/>
+            <a:off x="859536" y="3959352"/>
             <a:ext cx="10479024" cy="1051560"/>
           </a:xfrm>
           <a:prstGeom prst="rect">
@@ -27314,7 +29427,7 @@
         <p:spPr>
           <a:xfrm>
             <a:off x="658368" y="1600200"/>
-            <a:ext cx="10881360" cy="2651760"/>
+            <a:ext cx="10881360" cy="1673352"/>
           </a:xfrm>
           <a:prstGeom prst="rect">
             <a:avLst/>
@@ -27368,7 +29481,7 @@
         </p:nvSpPr>
         <p:spPr>
           <a:xfrm>
-            <a:off x="658368" y="4434840"/>
+            <a:off x="658368" y="3456432"/>
             <a:ext cx="10881360" cy="1325880"/>
           </a:xfrm>
           <a:prstGeom prst="roundRect">
@@ -27414,7 +29527,7 @@
         </p:nvSpPr>
         <p:spPr>
           <a:xfrm>
-            <a:off x="859536" y="4626864"/>
+            <a:off x="859536" y="3648456"/>
             <a:ext cx="10479024" cy="1051560"/>
           </a:xfrm>
           <a:prstGeom prst="rect">
@@ -28100,7 +30213,7 @@
         <p:spPr>
           <a:xfrm>
             <a:off x="658368" y="1600200"/>
-            <a:ext cx="10881360" cy="2651760"/>
+            <a:ext cx="10881360" cy="1984248"/>
           </a:xfrm>
           <a:prstGeom prst="rect">
             <a:avLst/>
@@ -28154,7 +30267,7 @@
         </p:nvSpPr>
         <p:spPr>
           <a:xfrm>
-            <a:off x="658368" y="4434840"/>
+            <a:off x="658368" y="3767328"/>
             <a:ext cx="10881360" cy="1325880"/>
           </a:xfrm>
           <a:prstGeom prst="roundRect">
@@ -28200,7 +30313,7 @@
         </p:nvSpPr>
         <p:spPr>
           <a:xfrm>
-            <a:off x="859536" y="4626864"/>
+            <a:off x="859536" y="3959352"/>
             <a:ext cx="10479024" cy="1051560"/>
           </a:xfrm>
           <a:prstGeom prst="rect">
@@ -28363,13 +30476,93 @@
       </p:sp>
       <p:sp>
         <p:nvSpPr>
-          <p:cNvPr id="4" name="Oval 3"/>
+          <p:cNvPr id="4" name="Rounded Rectangle 3"/>
           <p:cNvSpPr/>
           <p:nvPr/>
         </p:nvSpPr>
         <p:spPr>
           <a:xfrm>
-            <a:off x="621792" y="1508760"/>
+            <a:off x="5989320" y="1508760"/>
+            <a:ext cx="5550408" cy="4114800"/>
+          </a:xfrm>
+          <a:prstGeom prst="roundRect">
+            <a:avLst>
+              <a:gd name="adj" fmla="val 3000"/>
+            </a:avLst>
+          </a:prstGeom>
+          <a:solidFill>
+            <a:srgbClr val="F2F2F2"/>
+          </a:solidFill>
+          <a:ln>
+            <a:noFill/>
+          </a:ln>
+          <a:effectLst/>
+        </p:spPr>
+        <p:style>
+          <a:lnRef idx="1">
+            <a:schemeClr val="accent1"/>
+          </a:lnRef>
+          <a:fillRef idx="3">
+            <a:schemeClr val="accent1"/>
+          </a:fillRef>
+          <a:effectRef idx="2">
+            <a:schemeClr val="accent1"/>
+          </a:effectRef>
+          <a:fontRef idx="minor">
+            <a:schemeClr val="lt1"/>
+          </a:fontRef>
+        </p:style>
+        <p:txBody>
+          <a:bodyPr rtlCol="0" anchor="ctr"/>
+          <a:lstStyle/>
+          <a:p>
+            <a:pPr algn="ctr"/>
+          </a:p>
+        </p:txBody>
+      </p:sp>
+      <p:sp>
+        <p:nvSpPr>
+          <p:cNvPr id="5" name="TextBox 4"/>
+          <p:cNvSpPr txBox="1"/>
+          <p:nvPr/>
+        </p:nvSpPr>
+        <p:spPr>
+          <a:xfrm>
+            <a:off x="6217920" y="1618488"/>
+            <a:ext cx="5093208" cy="320040"/>
+          </a:xfrm>
+          <a:prstGeom prst="rect">
+            <a:avLst/>
+          </a:prstGeom>
+          <a:noFill/>
+        </p:spPr>
+        <p:txBody>
+          <a:bodyPr wrap="square">
+            <a:spAutoFit/>
+          </a:bodyPr>
+          <a:lstStyle/>
+          <a:p>
+            <a:r>
+              <a:rPr sz="1050" b="1" i="0">
+                <a:solidFill>
+                  <a:srgbClr val="595959"/>
+                </a:solidFill>
+                <a:latin typeface="Arial"/>
+              </a:rPr>
+              <a:t>THE PROMPT, AS PASTED</a:t>
+            </a:r>
+          </a:p>
+        </p:txBody>
+      </p:sp>
+      <p:sp>
+        <p:nvSpPr>
+          <p:cNvPr id="6" name="Oval 5"/>
+          <p:cNvSpPr/>
+          <p:nvPr/>
+        </p:nvSpPr>
+        <p:spPr>
+          <a:xfrm>
+            <a:off x="658368" y="2084832"/>
             <a:ext cx="310896" cy="310896"/>
           </a:xfrm>
           <a:prstGeom prst="ellipse">
@@ -28416,14 +30609,14 @@
       </p:sp>
       <p:sp>
         <p:nvSpPr>
-          <p:cNvPr id="5" name="TextBox 4"/>
+          <p:cNvPr id="7" name="TextBox 6"/>
           <p:cNvSpPr txBox="1"/>
           <p:nvPr/>
         </p:nvSpPr>
         <p:spPr>
           <a:xfrm>
-            <a:off x="1115568" y="1463040"/>
-            <a:ext cx="10527487" cy="1028699"/>
+            <a:off x="1115568" y="2011680"/>
+            <a:ext cx="4480560" cy="811530"/>
           </a:xfrm>
           <a:prstGeom prst="rect">
             <a:avLst/>
@@ -28436,13 +30629,8 @@
           </a:bodyPr>
           <a:lstStyle/>
           <a:p>
-            <a:pPr>
-              <a:spcAft>
-                <a:spcPts val="300"/>
-              </a:spcAft>
-            </a:pPr>
-            <a:r>
-              <a:rPr sz="1900" b="1" i="0">
+            <a:r>
+              <a:rPr sz="1600" b="1" i="0">
                 <a:solidFill>
                   <a:srgbClr val="1A1A1A"/>
                 </a:solidFill>
@@ -28451,16 +30639,122 @@
               <a:t>Name the input you are pasting.</a:t>
             </a:r>
           </a:p>
-          <a:p>
-            <a:pPr>
-              <a:spcAft>
-                <a:spcPts val="300"/>
-              </a:spcAft>
-            </a:pPr>
-            <a:r>
-              <a:rPr sz="1550" b="0" i="0">
-                <a:solidFill>
-                  <a:srgbClr val="595959"/>
+        </p:txBody>
+      </p:sp>
+      <p:sp>
+        <p:nvSpPr>
+          <p:cNvPr id="8" name="Rectangle 7"/>
+          <p:cNvSpPr/>
+          <p:nvPr/>
+        </p:nvSpPr>
+        <p:spPr>
+          <a:xfrm>
+            <a:off x="6099048" y="2103120"/>
+            <a:ext cx="54864" cy="674370"/>
+          </a:xfrm>
+          <a:prstGeom prst="rect">
+            <a:avLst/>
+          </a:prstGeom>
+          <a:solidFill>
+            <a:srgbClr val="009CD6"/>
+          </a:solidFill>
+          <a:ln>
+            <a:noFill/>
+          </a:ln>
+          <a:effectLst/>
+        </p:spPr>
+        <p:style>
+          <a:lnRef idx="1">
+            <a:schemeClr val="accent1"/>
+          </a:lnRef>
+          <a:fillRef idx="3">
+            <a:schemeClr val="accent1"/>
+          </a:fillRef>
+          <a:effectRef idx="2">
+            <a:schemeClr val="accent1"/>
+          </a:effectRef>
+          <a:fontRef idx="minor">
+            <a:schemeClr val="lt1"/>
+          </a:fontRef>
+        </p:style>
+        <p:txBody>
+          <a:bodyPr rtlCol="0" anchor="ctr"/>
+          <a:lstStyle/>
+          <a:p>
+            <a:pPr algn="ctr"/>
+          </a:p>
+        </p:txBody>
+      </p:sp>
+      <p:sp>
+        <p:nvSpPr>
+          <p:cNvPr id="9" name="Rectangle 8"/>
+          <p:cNvSpPr/>
+          <p:nvPr/>
+        </p:nvSpPr>
+        <p:spPr>
+          <a:xfrm>
+            <a:off x="5669280" y="2231136"/>
+            <a:ext cx="274320" cy="19050"/>
+          </a:xfrm>
+          <a:prstGeom prst="rect">
+            <a:avLst/>
+          </a:prstGeom>
+          <a:solidFill>
+            <a:srgbClr val="009CD6"/>
+          </a:solidFill>
+          <a:ln>
+            <a:noFill/>
+          </a:ln>
+          <a:effectLst/>
+        </p:spPr>
+        <p:style>
+          <a:lnRef idx="1">
+            <a:schemeClr val="accent1"/>
+          </a:lnRef>
+          <a:fillRef idx="3">
+            <a:schemeClr val="accent1"/>
+          </a:fillRef>
+          <a:effectRef idx="2">
+            <a:schemeClr val="accent1"/>
+          </a:effectRef>
+          <a:fontRef idx="minor">
+            <a:schemeClr val="lt1"/>
+          </a:fontRef>
+        </p:style>
+        <p:txBody>
+          <a:bodyPr rtlCol="0" anchor="ctr"/>
+          <a:lstStyle/>
+          <a:p>
+            <a:pPr algn="ctr"/>
+          </a:p>
+        </p:txBody>
+      </p:sp>
+      <p:sp>
+        <p:nvSpPr>
+          <p:cNvPr id="10" name="TextBox 9"/>
+          <p:cNvSpPr txBox="1"/>
+          <p:nvPr/>
+        </p:nvSpPr>
+        <p:spPr>
+          <a:xfrm>
+            <a:off x="6281928" y="2029968"/>
+            <a:ext cx="5047488" cy="811530"/>
+          </a:xfrm>
+          <a:prstGeom prst="rect">
+            <a:avLst/>
+          </a:prstGeom>
+          <a:noFill/>
+        </p:spPr>
+        <p:txBody>
+          <a:bodyPr wrap="square">
+            <a:spAutoFit/>
+          </a:bodyPr>
+          <a:lstStyle/>
+          <a:p>
+            <a:r>
+              <a:rPr sz="1500" b="0" i="1">
+                <a:solidFill>
+                  <a:srgbClr val="1A1A1A"/>
                 </a:solidFill>
                 <a:latin typeface="Arial"/>
               </a:rPr>
@@ -28471,14 +30765,14 @@
       </p:sp>
       <p:sp>
         <p:nvSpPr>
-          <p:cNvPr id="6" name="Rectangle 5"/>
+          <p:cNvPr id="11" name="Rectangle 10"/>
           <p:cNvSpPr/>
           <p:nvPr/>
         </p:nvSpPr>
         <p:spPr>
           <a:xfrm>
-            <a:off x="621792" y="2496312"/>
-            <a:ext cx="10881360" cy="12700"/>
+            <a:off x="658368" y="2868930"/>
+            <a:ext cx="4937760" cy="12700"/>
           </a:xfrm>
           <a:prstGeom prst="rect">
             <a:avLst/>
@@ -28515,13 +30809,13 @@
       </p:sp>
       <p:sp>
         <p:nvSpPr>
-          <p:cNvPr id="7" name="Oval 6"/>
+          <p:cNvPr id="12" name="Oval 11"/>
           <p:cNvSpPr/>
           <p:nvPr/>
         </p:nvSpPr>
         <p:spPr>
           <a:xfrm>
-            <a:off x="621792" y="2583179"/>
+            <a:off x="658368" y="2987802"/>
             <a:ext cx="310896" cy="310896"/>
           </a:xfrm>
           <a:prstGeom prst="ellipse">
@@ -28568,14 +30862,14 @@
       </p:sp>
       <p:sp>
         <p:nvSpPr>
-          <p:cNvPr id="8" name="TextBox 7"/>
+          <p:cNvPr id="13" name="TextBox 12"/>
           <p:cNvSpPr txBox="1"/>
           <p:nvPr/>
         </p:nvSpPr>
         <p:spPr>
           <a:xfrm>
-            <a:off x="1115568" y="2537460"/>
-            <a:ext cx="10527487" cy="1028699"/>
+            <a:off x="1115568" y="2914650"/>
+            <a:ext cx="4480560" cy="811530"/>
           </a:xfrm>
           <a:prstGeom prst="rect">
             <a:avLst/>
@@ -28588,13 +30882,8 @@
           </a:bodyPr>
           <a:lstStyle/>
           <a:p>
-            <a:pPr>
-              <a:spcAft>
-                <a:spcPts val="300"/>
-              </a:spcAft>
-            </a:pPr>
-            <a:r>
-              <a:rPr sz="1900" b="1" i="0">
+            <a:r>
+              <a:rPr sz="1600" b="1" i="0">
                 <a:solidFill>
                   <a:srgbClr val="1A1A1A"/>
                 </a:solidFill>
@@ -28603,16 +30892,122 @@
               <a:t>Break the task into named outputs.</a:t>
             </a:r>
           </a:p>
-          <a:p>
-            <a:pPr>
-              <a:spcAft>
-                <a:spcPts val="300"/>
-              </a:spcAft>
-            </a:pPr>
-            <a:r>
-              <a:rPr sz="1550" b="0" i="0">
-                <a:solidFill>
-                  <a:srgbClr val="595959"/>
+        </p:txBody>
+      </p:sp>
+      <p:sp>
+        <p:nvSpPr>
+          <p:cNvPr id="14" name="Rectangle 13"/>
+          <p:cNvSpPr/>
+          <p:nvPr/>
+        </p:nvSpPr>
+        <p:spPr>
+          <a:xfrm>
+            <a:off x="6099048" y="3006090"/>
+            <a:ext cx="54864" cy="674370"/>
+          </a:xfrm>
+          <a:prstGeom prst="rect">
+            <a:avLst/>
+          </a:prstGeom>
+          <a:solidFill>
+            <a:srgbClr val="009CD6"/>
+          </a:solidFill>
+          <a:ln>
+            <a:noFill/>
+          </a:ln>
+          <a:effectLst/>
+        </p:spPr>
+        <p:style>
+          <a:lnRef idx="1">
+            <a:schemeClr val="accent1"/>
+          </a:lnRef>
+          <a:fillRef idx="3">
+            <a:schemeClr val="accent1"/>
+          </a:fillRef>
+          <a:effectRef idx="2">
+            <a:schemeClr val="accent1"/>
+          </a:effectRef>
+          <a:fontRef idx="minor">
+            <a:schemeClr val="lt1"/>
+          </a:fontRef>
+        </p:style>
+        <p:txBody>
+          <a:bodyPr rtlCol="0" anchor="ctr"/>
+          <a:lstStyle/>
+          <a:p>
+            <a:pPr algn="ctr"/>
+          </a:p>
+        </p:txBody>
+      </p:sp>
+      <p:sp>
+        <p:nvSpPr>
+          <p:cNvPr id="15" name="Rectangle 14"/>
+          <p:cNvSpPr/>
+          <p:nvPr/>
+        </p:nvSpPr>
+        <p:spPr>
+          <a:xfrm>
+            <a:off x="5669280" y="3134106"/>
+            <a:ext cx="274320" cy="19050"/>
+          </a:xfrm>
+          <a:prstGeom prst="rect">
+            <a:avLst/>
+          </a:prstGeom>
+          <a:solidFill>
+            <a:srgbClr val="009CD6"/>
+          </a:solidFill>
+          <a:ln>
+            <a:noFill/>
+          </a:ln>
+          <a:effectLst/>
+        </p:spPr>
+        <p:style>
+          <a:lnRef idx="1">
+            <a:schemeClr val="accent1"/>
+          </a:lnRef>
+          <a:fillRef idx="3">
+            <a:schemeClr val="accent1"/>
+          </a:fillRef>
+          <a:effectRef idx="2">
+            <a:schemeClr val="accent1"/>
+          </a:effectRef>
+          <a:fontRef idx="minor">
+            <a:schemeClr val="lt1"/>
+          </a:fontRef>
+        </p:style>
+        <p:txBody>
+          <a:bodyPr rtlCol="0" anchor="ctr"/>
+          <a:lstStyle/>
+          <a:p>
+            <a:pPr algn="ctr"/>
+          </a:p>
+        </p:txBody>
+      </p:sp>
+      <p:sp>
+        <p:nvSpPr>
+          <p:cNvPr id="16" name="TextBox 15"/>
+          <p:cNvSpPr txBox="1"/>
+          <p:nvPr/>
+        </p:nvSpPr>
+        <p:spPr>
+          <a:xfrm>
+            <a:off x="6281928" y="2932938"/>
+            <a:ext cx="5047488" cy="811530"/>
+          </a:xfrm>
+          <a:prstGeom prst="rect">
+            <a:avLst/>
+          </a:prstGeom>
+          <a:noFill/>
+        </p:spPr>
+        <p:txBody>
+          <a:bodyPr wrap="square">
+            <a:spAutoFit/>
+          </a:bodyPr>
+          <a:lstStyle/>
+          <a:p>
+            <a:r>
+              <a:rPr sz="1500" b="0" i="1">
+                <a:solidFill>
+                  <a:srgbClr val="1A1A1A"/>
                 </a:solidFill>
                 <a:latin typeface="Arial"/>
               </a:rPr>
@@ -28623,14 +31018,14 @@
       </p:sp>
       <p:sp>
         <p:nvSpPr>
-          <p:cNvPr id="9" name="Rectangle 8"/>
+          <p:cNvPr id="17" name="Rectangle 16"/>
           <p:cNvSpPr/>
           <p:nvPr/>
         </p:nvSpPr>
         <p:spPr>
           <a:xfrm>
-            <a:off x="621792" y="3570732"/>
-            <a:ext cx="10881360" cy="12700"/>
+            <a:off x="658368" y="3771900"/>
+            <a:ext cx="4937760" cy="12700"/>
           </a:xfrm>
           <a:prstGeom prst="rect">
             <a:avLst/>
@@ -28667,13 +31062,13 @@
       </p:sp>
       <p:sp>
         <p:nvSpPr>
-          <p:cNvPr id="10" name="Oval 9"/>
+          <p:cNvPr id="18" name="Oval 17"/>
           <p:cNvSpPr/>
           <p:nvPr/>
         </p:nvSpPr>
         <p:spPr>
           <a:xfrm>
-            <a:off x="621792" y="3657599"/>
+            <a:off x="658368" y="3890772"/>
             <a:ext cx="310896" cy="310896"/>
           </a:xfrm>
           <a:prstGeom prst="ellipse">
@@ -28720,14 +31115,14 @@
       </p:sp>
       <p:sp>
         <p:nvSpPr>
-          <p:cNvPr id="11" name="TextBox 10"/>
+          <p:cNvPr id="19" name="TextBox 18"/>
           <p:cNvSpPr txBox="1"/>
           <p:nvPr/>
         </p:nvSpPr>
         <p:spPr>
           <a:xfrm>
-            <a:off x="1115568" y="3611879"/>
-            <a:ext cx="10527487" cy="1028699"/>
+            <a:off x="1115568" y="3817620"/>
+            <a:ext cx="4480560" cy="811530"/>
           </a:xfrm>
           <a:prstGeom prst="rect">
             <a:avLst/>
@@ -28740,13 +31135,8 @@
           </a:bodyPr>
           <a:lstStyle/>
           <a:p>
-            <a:pPr>
-              <a:spcAft>
-                <a:spcPts val="300"/>
-              </a:spcAft>
-            </a:pPr>
-            <a:r>
-              <a:rPr sz="1900" b="1" i="0">
+            <a:r>
+              <a:rPr sz="1600" b="1" i="0">
                 <a:solidFill>
                   <a:srgbClr val="1A1A1A"/>
                 </a:solidFill>
@@ -28755,16 +31145,122 @@
               <a:t>State the exact output format you want.</a:t>
             </a:r>
           </a:p>
-          <a:p>
-            <a:pPr>
-              <a:spcAft>
-                <a:spcPts val="300"/>
-              </a:spcAft>
-            </a:pPr>
-            <a:r>
-              <a:rPr sz="1550" b="0" i="0">
-                <a:solidFill>
-                  <a:srgbClr val="595959"/>
+        </p:txBody>
+      </p:sp>
+      <p:sp>
+        <p:nvSpPr>
+          <p:cNvPr id="20" name="Rectangle 19"/>
+          <p:cNvSpPr/>
+          <p:nvPr/>
+        </p:nvSpPr>
+        <p:spPr>
+          <a:xfrm>
+            <a:off x="6099048" y="3909060"/>
+            <a:ext cx="54864" cy="674370"/>
+          </a:xfrm>
+          <a:prstGeom prst="rect">
+            <a:avLst/>
+          </a:prstGeom>
+          <a:solidFill>
+            <a:srgbClr val="009CD6"/>
+          </a:solidFill>
+          <a:ln>
+            <a:noFill/>
+          </a:ln>
+          <a:effectLst/>
+        </p:spPr>
+        <p:style>
+          <a:lnRef idx="1">
+            <a:schemeClr val="accent1"/>
+          </a:lnRef>
+          <a:fillRef idx="3">
+            <a:schemeClr val="accent1"/>
+          </a:fillRef>
+          <a:effectRef idx="2">
+            <a:schemeClr val="accent1"/>
+          </a:effectRef>
+          <a:fontRef idx="minor">
+            <a:schemeClr val="lt1"/>
+          </a:fontRef>
+        </p:style>
+        <p:txBody>
+          <a:bodyPr rtlCol="0" anchor="ctr"/>
+          <a:lstStyle/>
+          <a:p>
+            <a:pPr algn="ctr"/>
+          </a:p>
+        </p:txBody>
+      </p:sp>
+      <p:sp>
+        <p:nvSpPr>
+          <p:cNvPr id="21" name="Rectangle 20"/>
+          <p:cNvSpPr/>
+          <p:nvPr/>
+        </p:nvSpPr>
+        <p:spPr>
+          <a:xfrm>
+            <a:off x="5669280" y="4037076"/>
+            <a:ext cx="274320" cy="19050"/>
+          </a:xfrm>
+          <a:prstGeom prst="rect">
+            <a:avLst/>
+          </a:prstGeom>
+          <a:solidFill>
+            <a:srgbClr val="009CD6"/>
+          </a:solidFill>
+          <a:ln>
+            <a:noFill/>
+          </a:ln>
+          <a:effectLst/>
+        </p:spPr>
+        <p:style>
+          <a:lnRef idx="1">
+            <a:schemeClr val="accent1"/>
+          </a:lnRef>
+          <a:fillRef idx="3">
+            <a:schemeClr val="accent1"/>
+          </a:fillRef>
+          <a:effectRef idx="2">
+            <a:schemeClr val="accent1"/>
+          </a:effectRef>
+          <a:fontRef idx="minor">
+            <a:schemeClr val="lt1"/>
+          </a:fontRef>
+        </p:style>
+        <p:txBody>
+          <a:bodyPr rtlCol="0" anchor="ctr"/>
+          <a:lstStyle/>
+          <a:p>
+            <a:pPr algn="ctr"/>
+          </a:p>
+        </p:txBody>
+      </p:sp>
+      <p:sp>
+        <p:nvSpPr>
+          <p:cNvPr id="22" name="TextBox 21"/>
+          <p:cNvSpPr txBox="1"/>
+          <p:nvPr/>
+        </p:nvSpPr>
+        <p:spPr>
+          <a:xfrm>
+            <a:off x="6281928" y="3835908"/>
+            <a:ext cx="5047488" cy="811530"/>
+          </a:xfrm>
+          <a:prstGeom prst="rect">
+            <a:avLst/>
+          </a:prstGeom>
+          <a:noFill/>
+        </p:spPr>
+        <p:txBody>
+          <a:bodyPr wrap="square">
+            <a:spAutoFit/>
+          </a:bodyPr>
+          <a:lstStyle/>
+          <a:p>
+            <a:r>
+              <a:rPr sz="1500" b="0" i="1">
+                <a:solidFill>
+                  <a:srgbClr val="1A1A1A"/>
                 </a:solidFill>
                 <a:latin typeface="Arial"/>
               </a:rPr>
@@ -28775,14 +31271,14 @@
       </p:sp>
       <p:sp>
         <p:nvSpPr>
-          <p:cNvPr id="12" name="Rectangle 11"/>
+          <p:cNvPr id="23" name="Rectangle 22"/>
           <p:cNvSpPr/>
           <p:nvPr/>
         </p:nvSpPr>
         <p:spPr>
           <a:xfrm>
-            <a:off x="621792" y="4645152"/>
-            <a:ext cx="10881360" cy="12700"/>
+            <a:off x="658368" y="4674870"/>
+            <a:ext cx="4937760" cy="12700"/>
           </a:xfrm>
           <a:prstGeom prst="rect">
             <a:avLst/>
@@ -28819,13 +31315,13 @@
       </p:sp>
       <p:sp>
         <p:nvSpPr>
-          <p:cNvPr id="13" name="Oval 12"/>
+          <p:cNvPr id="24" name="Oval 23"/>
           <p:cNvSpPr/>
           <p:nvPr/>
         </p:nvSpPr>
         <p:spPr>
           <a:xfrm>
-            <a:off x="621792" y="4732020"/>
+            <a:off x="658368" y="4793742"/>
             <a:ext cx="310896" cy="310896"/>
           </a:xfrm>
           <a:prstGeom prst="ellipse">
@@ -28872,14 +31368,14 @@
       </p:sp>
       <p:sp>
         <p:nvSpPr>
-          <p:cNvPr id="14" name="TextBox 13"/>
+          <p:cNvPr id="25" name="TextBox 24"/>
           <p:cNvSpPr txBox="1"/>
           <p:nvPr/>
         </p:nvSpPr>
         <p:spPr>
           <a:xfrm>
-            <a:off x="1115568" y="4686300"/>
-            <a:ext cx="10527487" cy="1028699"/>
+            <a:off x="1115568" y="4720590"/>
+            <a:ext cx="4480560" cy="811530"/>
           </a:xfrm>
           <a:prstGeom prst="rect">
             <a:avLst/>
@@ -28892,13 +31388,8 @@
           </a:bodyPr>
           <a:lstStyle/>
           <a:p>
-            <a:pPr>
-              <a:spcAft>
-                <a:spcPts val="300"/>
-              </a:spcAft>
-            </a:pPr>
-            <a:r>
-              <a:rPr sz="1900" b="1" i="0">
+            <a:r>
+              <a:rPr sz="1600" b="1" i="0">
                 <a:solidFill>
                   <a:srgbClr val="1A1A1A"/>
                 </a:solidFill>
@@ -28907,34 +31398,106 @@
               <a:t>Add a safeguard line for this prompt's specific risk.</a:t>
             </a:r>
           </a:p>
-          <a:p>
-            <a:pPr>
-              <a:spcAft>
-                <a:spcPts val="300"/>
-              </a:spcAft>
-            </a:pPr>
-            <a:r>
-              <a:rPr sz="1550" b="0" i="0">
-                <a:solidFill>
-                  <a:srgbClr val="595959"/>
-                </a:solidFill>
-                <a:latin typeface="Arial"/>
-              </a:rPr>
-              <a:t>"Flag any gap involving a politically powerful body."</a:t>
-            </a:r>
-          </a:p>
-        </p:txBody>
-      </p:sp>
-      <p:sp>
-        <p:nvSpPr>
-          <p:cNvPr id="15" name="TextBox 14"/>
+        </p:txBody>
+      </p:sp>
+      <p:sp>
+        <p:nvSpPr>
+          <p:cNvPr id="26" name="Rectangle 25"/>
+          <p:cNvSpPr/>
+          <p:nvPr/>
+        </p:nvSpPr>
+        <p:spPr>
+          <a:xfrm>
+            <a:off x="6099048" y="4812030"/>
+            <a:ext cx="54864" cy="674370"/>
+          </a:xfrm>
+          <a:prstGeom prst="rect">
+            <a:avLst/>
+          </a:prstGeom>
+          <a:solidFill>
+            <a:srgbClr val="009CD6"/>
+          </a:solidFill>
+          <a:ln>
+            <a:noFill/>
+          </a:ln>
+          <a:effectLst/>
+        </p:spPr>
+        <p:style>
+          <a:lnRef idx="1">
+            <a:schemeClr val="accent1"/>
+          </a:lnRef>
+          <a:fillRef idx="3">
+            <a:schemeClr val="accent1"/>
+          </a:fillRef>
+          <a:effectRef idx="2">
+            <a:schemeClr val="accent1"/>
+          </a:effectRef>
+          <a:fontRef idx="minor">
+            <a:schemeClr val="lt1"/>
+          </a:fontRef>
+        </p:style>
+        <p:txBody>
+          <a:bodyPr rtlCol="0" anchor="ctr"/>
+          <a:lstStyle/>
+          <a:p>
+            <a:pPr algn="ctr"/>
+          </a:p>
+        </p:txBody>
+      </p:sp>
+      <p:sp>
+        <p:nvSpPr>
+          <p:cNvPr id="27" name="Rectangle 26"/>
+          <p:cNvSpPr/>
+          <p:nvPr/>
+        </p:nvSpPr>
+        <p:spPr>
+          <a:xfrm>
+            <a:off x="5669280" y="4940046"/>
+            <a:ext cx="274320" cy="19050"/>
+          </a:xfrm>
+          <a:prstGeom prst="rect">
+            <a:avLst/>
+          </a:prstGeom>
+          <a:solidFill>
+            <a:srgbClr val="009CD6"/>
+          </a:solidFill>
+          <a:ln>
+            <a:noFill/>
+          </a:ln>
+          <a:effectLst/>
+        </p:spPr>
+        <p:style>
+          <a:lnRef idx="1">
+            <a:schemeClr val="accent1"/>
+          </a:lnRef>
+          <a:fillRef idx="3">
+            <a:schemeClr val="accent1"/>
+          </a:fillRef>
+          <a:effectRef idx="2">
+            <a:schemeClr val="accent1"/>
+          </a:effectRef>
+          <a:fontRef idx="minor">
+            <a:schemeClr val="lt1"/>
+          </a:fontRef>
+        </p:style>
+        <p:txBody>
+          <a:bodyPr rtlCol="0" anchor="ctr"/>
+          <a:lstStyle/>
+          <a:p>
+            <a:pPr algn="ctr"/>
+          </a:p>
+        </p:txBody>
+      </p:sp>
+      <p:sp>
+        <p:nvSpPr>
+          <p:cNvPr id="28" name="TextBox 27"/>
           <p:cNvSpPr txBox="1"/>
           <p:nvPr/>
         </p:nvSpPr>
         <p:spPr>
           <a:xfrm>
-            <a:off x="658368" y="5870448"/>
-            <a:ext cx="10881360" cy="548640"/>
+            <a:off x="6281928" y="4738878"/>
+            <a:ext cx="5047488" cy="811530"/>
           </a:xfrm>
           <a:prstGeom prst="rect">
             <a:avLst/>
@@ -28948,6 +31511,40 @@
           <a:lstStyle/>
           <a:p>
             <a:r>
+              <a:rPr sz="1500" b="0" i="1">
+                <a:solidFill>
+                  <a:srgbClr val="1A1A1A"/>
+                </a:solidFill>
+                <a:latin typeface="Arial"/>
+              </a:rPr>
+              <a:t>"Flag any gap involving a politically powerful body."</a:t>
+            </a:r>
+          </a:p>
+        </p:txBody>
+      </p:sp>
+      <p:sp>
+        <p:nvSpPr>
+          <p:cNvPr id="29" name="TextBox 28"/>
+          <p:cNvSpPr txBox="1"/>
+          <p:nvPr/>
+        </p:nvSpPr>
+        <p:spPr>
+          <a:xfrm>
+            <a:off x="658368" y="5760720"/>
+            <a:ext cx="10881360" cy="548640"/>
+          </a:xfrm>
+          <a:prstGeom prst="rect">
+            <a:avLst/>
+          </a:prstGeom>
+          <a:noFill/>
+        </p:spPr>
+        <p:txBody>
+          <a:bodyPr wrap="square">
+            <a:spAutoFit/>
+          </a:bodyPr>
+          <a:lstStyle/>
+          <a:p>
+            <a:r>
               <a:rPr sz="1550" b="1" i="0">
                 <a:solidFill>
                   <a:srgbClr val="006E96"/>
@@ -28961,7 +31558,7 @@
       </p:sp>
       <p:sp>
         <p:nvSpPr>
-          <p:cNvPr id="16" name="TextBox 15"/>
+          <p:cNvPr id="30" name="TextBox 29"/>
           <p:cNvSpPr txBox="1"/>
           <p:nvPr/>
         </p:nvSpPr>
@@ -29483,69 +32080,14 @@
       </p:sp>
       <p:sp>
         <p:nvSpPr>
-          <p:cNvPr id="4" name="TextBox 3"/>
-          <p:cNvSpPr txBox="1"/>
-          <p:nvPr/>
-        </p:nvSpPr>
-        <p:spPr>
-          <a:xfrm>
-            <a:off x="658368" y="1600200"/>
-            <a:ext cx="10881360" cy="2651760"/>
-          </a:xfrm>
-          <a:prstGeom prst="rect">
-            <a:avLst/>
-          </a:prstGeom>
-          <a:noFill/>
-        </p:spPr>
-        <p:txBody>
-          <a:bodyPr wrap="square">
-            <a:spAutoFit/>
-          </a:bodyPr>
-          <a:lstStyle/>
-          <a:p>
-            <a:pPr>
-              <a:spcAft>
-                <a:spcPts val="1200"/>
-              </a:spcAft>
-            </a:pPr>
-            <a:r>
-              <a:rPr sz="2000" b="0" i="0">
-                <a:solidFill>
-                  <a:srgbClr val="1A1A1A"/>
-                </a:solidFill>
-                <a:latin typeface="Arial"/>
-              </a:rPr>
-              <a:t>For a gap analysis: a severity judgement about a powerful ministry must be checked with the decision-maker, not softened by the model.</a:t>
-            </a:r>
-          </a:p>
-          <a:p>
-            <a:pPr>
-              <a:spcAft>
-                <a:spcPts val="1200"/>
-              </a:spcAft>
-            </a:pPr>
-            <a:r>
-              <a:rPr sz="2000" b="0" i="0">
-                <a:solidFill>
-                  <a:srgbClr val="1A1A1A"/>
-                </a:solidFill>
-                <a:latin typeface="Arial"/>
-              </a:rPr>
-              <a:t>For a comparator card: discard any country example where the cited source does not actually say what the prompt claims.</a:t>
-            </a:r>
-          </a:p>
-        </p:txBody>
-      </p:sp>
-      <p:sp>
-        <p:nvSpPr>
-          <p:cNvPr id="5" name="Rounded Rectangle 4"/>
+          <p:cNvPr id="4" name="Rounded Rectangle 3"/>
           <p:cNvSpPr/>
           <p:nvPr/>
         </p:nvSpPr>
         <p:spPr>
           <a:xfrm>
-            <a:off x="658368" y="4434840"/>
-            <a:ext cx="10881360" cy="1325880"/>
+            <a:off x="658368" y="1554480"/>
+            <a:ext cx="5394960" cy="3977639"/>
           </a:xfrm>
           <a:prstGeom prst="roundRect">
             <a:avLst>
@@ -29584,14 +32126,14 @@
       </p:sp>
       <p:sp>
         <p:nvSpPr>
-          <p:cNvPr id="6" name="TextBox 5"/>
+          <p:cNvPr id="5" name="TextBox 4"/>
           <p:cNvSpPr txBox="1"/>
           <p:nvPr/>
         </p:nvSpPr>
         <p:spPr>
           <a:xfrm>
-            <a:off x="859536" y="4626864"/>
-            <a:ext cx="10479024" cy="1051560"/>
+            <a:off x="859536" y="1700784"/>
+            <a:ext cx="4992624" cy="3703320"/>
           </a:xfrm>
           <a:prstGeom prst="rect">
             <a:avLst/>
@@ -29610,12 +32152,227 @@
               </a:spcAft>
             </a:pPr>
             <a:r>
-              <a:rPr sz="2300" b="1" i="0">
+              <a:rPr sz="1900" b="1" i="0">
                 <a:solidFill>
                   <a:srgbClr val="006E96"/>
                 </a:solidFill>
                 <a:latin typeface="Arial"/>
               </a:rPr>
+              <a:t>FOR A GAP ANALYSIS</a:t>
+            </a:r>
+          </a:p>
+          <a:p>
+            <a:pPr>
+              <a:spcAft>
+                <a:spcPts val="700"/>
+              </a:spcAft>
+            </a:pPr>
+            <a:r>
+              <a:rPr sz="1600" b="0" i="0">
+                <a:solidFill>
+                  <a:srgbClr val="1A1A1A"/>
+                </a:solidFill>
+                <a:latin typeface="Arial"/>
+              </a:rPr>
+              <a:t>A severity judgement about a powerful ministry must be checked with the decision-maker.</a:t>
+            </a:r>
+          </a:p>
+          <a:p>
+            <a:pPr>
+              <a:spcAft>
+                <a:spcPts val="700"/>
+              </a:spcAft>
+            </a:pPr>
+            <a:r>
+              <a:rPr sz="1600" b="0" i="0">
+                <a:solidFill>
+                  <a:srgbClr val="1A1A1A"/>
+                </a:solidFill>
+                <a:latin typeface="Arial"/>
+              </a:rPr>
+              <a:t>Not softened by the model.</a:t>
+            </a:r>
+          </a:p>
+          <a:p>
+            <a:pPr>
+              <a:spcAft>
+                <a:spcPts val="700"/>
+              </a:spcAft>
+            </a:pPr>
+            <a:r>
+              <a:rPr sz="1600" b="0" i="0">
+                <a:solidFill>
+                  <a:srgbClr val="1A1A1A"/>
+                </a:solidFill>
+                <a:latin typeface="Arial"/>
+              </a:rPr>
+              <a:t>The trap here is a model being diplomatic about power.</a:t>
+            </a:r>
+          </a:p>
+        </p:txBody>
+      </p:sp>
+      <p:sp>
+        <p:nvSpPr>
+          <p:cNvPr id="6" name="Rounded Rectangle 5"/>
+          <p:cNvSpPr/>
+          <p:nvPr/>
+        </p:nvSpPr>
+        <p:spPr>
+          <a:xfrm>
+            <a:off x="6263640" y="1554480"/>
+            <a:ext cx="5394960" cy="3977639"/>
+          </a:xfrm>
+          <a:prstGeom prst="roundRect">
+            <a:avLst>
+              <a:gd name="adj" fmla="val 4500"/>
+            </a:avLst>
+          </a:prstGeom>
+          <a:solidFill>
+            <a:srgbClr val="F2F2F2"/>
+          </a:solidFill>
+          <a:ln>
+            <a:noFill/>
+          </a:ln>
+          <a:effectLst/>
+        </p:spPr>
+        <p:style>
+          <a:lnRef idx="1">
+            <a:schemeClr val="accent1"/>
+          </a:lnRef>
+          <a:fillRef idx="3">
+            <a:schemeClr val="accent1"/>
+          </a:fillRef>
+          <a:effectRef idx="2">
+            <a:schemeClr val="accent1"/>
+          </a:effectRef>
+          <a:fontRef idx="minor">
+            <a:schemeClr val="lt1"/>
+          </a:fontRef>
+        </p:style>
+        <p:txBody>
+          <a:bodyPr rtlCol="0" anchor="ctr"/>
+          <a:lstStyle/>
+          <a:p>
+            <a:pPr algn="ctr"/>
+          </a:p>
+        </p:txBody>
+      </p:sp>
+      <p:sp>
+        <p:nvSpPr>
+          <p:cNvPr id="7" name="TextBox 6"/>
+          <p:cNvSpPr txBox="1"/>
+          <p:nvPr/>
+        </p:nvSpPr>
+        <p:spPr>
+          <a:xfrm>
+            <a:off x="6464808" y="1700784"/>
+            <a:ext cx="4992624" cy="3703320"/>
+          </a:xfrm>
+          <a:prstGeom prst="rect">
+            <a:avLst/>
+          </a:prstGeom>
+          <a:noFill/>
+        </p:spPr>
+        <p:txBody>
+          <a:bodyPr wrap="square">
+            <a:spAutoFit/>
+          </a:bodyPr>
+          <a:lstStyle/>
+          <a:p>
+            <a:pPr>
+              <a:spcAft>
+                <a:spcPts val="700"/>
+              </a:spcAft>
+            </a:pPr>
+            <a:r>
+              <a:rPr sz="1900" b="1" i="0">
+                <a:solidFill>
+                  <a:srgbClr val="006E96"/>
+                </a:solidFill>
+                <a:latin typeface="Arial"/>
+              </a:rPr>
+              <a:t>FOR A COMPARATOR CARD</a:t>
+            </a:r>
+          </a:p>
+          <a:p>
+            <a:pPr>
+              <a:spcAft>
+                <a:spcPts val="700"/>
+              </a:spcAft>
+            </a:pPr>
+            <a:r>
+              <a:rPr sz="1600" b="0" i="0">
+                <a:solidFill>
+                  <a:srgbClr val="1A1A1A"/>
+                </a:solidFill>
+                <a:latin typeface="Arial"/>
+              </a:rPr>
+              <a:t>Discard any country example where the cited source does not actually say what the prompt claims.</a:t>
+            </a:r>
+          </a:p>
+          <a:p>
+            <a:pPr>
+              <a:spcAft>
+                <a:spcPts val="700"/>
+              </a:spcAft>
+            </a:pPr>
+            <a:r>
+              <a:rPr sz="1600" b="0" i="0">
+                <a:solidFill>
+                  <a:srgbClr val="1A1A1A"/>
+                </a:solidFill>
+                <a:latin typeface="Arial"/>
+              </a:rPr>
+              <a:t>Discard the claim, not just the citation.</a:t>
+            </a:r>
+          </a:p>
+          <a:p>
+            <a:pPr>
+              <a:spcAft>
+                <a:spcPts val="700"/>
+              </a:spcAft>
+            </a:pPr>
+            <a:r>
+              <a:rPr sz="1600" b="0" i="0">
+                <a:solidFill>
+                  <a:srgbClr val="1A1A1A"/>
+                </a:solidFill>
+                <a:latin typeface="Arial"/>
+              </a:rPr>
+              <a:t>The trap here is a fluent, invented source.</a:t>
+            </a:r>
+          </a:p>
+        </p:txBody>
+      </p:sp>
+      <p:sp>
+        <p:nvSpPr>
+          <p:cNvPr id="8" name="TextBox 7"/>
+          <p:cNvSpPr txBox="1"/>
+          <p:nvPr/>
+        </p:nvSpPr>
+        <p:spPr>
+          <a:xfrm>
+            <a:off x="658368" y="5715000"/>
+            <a:ext cx="10881360" cy="548640"/>
+          </a:xfrm>
+          <a:prstGeom prst="rect">
+            <a:avLst/>
+          </a:prstGeom>
+          <a:noFill/>
+        </p:spPr>
+        <p:txBody>
+          <a:bodyPr wrap="square">
+            <a:spAutoFit/>
+          </a:bodyPr>
+          <a:lstStyle/>
+          <a:p>
+            <a:r>
+              <a:rPr sz="1550" b="1" i="0">
+                <a:solidFill>
+                  <a:srgbClr val="006E96"/>
+                </a:solidFill>
+                <a:latin typeface="Arial"/>
+              </a:rPr>
               <a:t>Not "AI can make mistakes" — that helps no one.</a:t>
             </a:r>
           </a:p>
@@ -29623,7 +32380,7 @@
       </p:sp>
       <p:sp>
         <p:nvSpPr>
-          <p:cNvPr id="7" name="TextBox 6"/>
+          <p:cNvPr id="9" name="TextBox 8"/>
           <p:cNvSpPr txBox="1"/>
           <p:nvPr/>
         </p:nvSpPr>
@@ -29760,7 +32517,7 @@
         <p:spPr>
           <a:xfrm>
             <a:off x="658368" y="1600200"/>
-            <a:ext cx="10881360" cy="2651760"/>
+            <a:ext cx="10881360" cy="1984248"/>
           </a:xfrm>
           <a:prstGeom prst="rect">
             <a:avLst/>
@@ -29814,7 +32571,7 @@
         </p:nvSpPr>
         <p:spPr>
           <a:xfrm>
-            <a:off x="658368" y="4434840"/>
+            <a:off x="658368" y="3767328"/>
             <a:ext cx="10881360" cy="1325880"/>
           </a:xfrm>
           <a:prstGeom prst="roundRect">
@@ -29860,7 +32617,7 @@
         </p:nvSpPr>
         <p:spPr>
           <a:xfrm>
-            <a:off x="859536" y="4626864"/>
+            <a:off x="859536" y="3959352"/>
             <a:ext cx="10479024" cy="1051560"/>
           </a:xfrm>
           <a:prstGeom prst="rect">
